--- a/public/lessons/year-6-maths/summer/week-24/distinguish-perimeter-and-area/teaching-powerpoint-v1.pptx
+++ b/public/lessons/year-6-maths/summer/week-24/distinguish-perimeter-and-area/teaching-powerpoint-v1.pptx
@@ -2,24 +2,24 @@
 <file path=ppt/presentation.xml><?xml version="1.0" encoding="utf-8"?>
 <p:presentation xmlns:p="http://schemas.openxmlformats.org/presentationml/2006/main">
   <p:sldMasterIdLst>
-    <p:sldMasterId xmlns:r="http://schemas.openxmlformats.org/officeDocument/2006/relationships" id="2147483648" r:id="Ra2557ae8b04e443c"/>
+    <p:sldMasterId xmlns:r="http://schemas.openxmlformats.org/officeDocument/2006/relationships" id="2147483648" r:id="Reabf3c7490214da3"/>
   </p:sldMasterIdLst>
   <p:notesMasterIdLst>
-    <p:notesMasterId xmlns:r="http://schemas.openxmlformats.org/officeDocument/2006/relationships" r:id="R01ad8b04e0bb4df9"/>
+    <p:notesMasterId xmlns:r="http://schemas.openxmlformats.org/officeDocument/2006/relationships" r:id="R89448752488646e6"/>
   </p:notesMasterIdLst>
   <p:sldIdLst>
-    <p:sldId xmlns:r="http://schemas.openxmlformats.org/officeDocument/2006/relationships" id="256" r:id="Rc89c6b92c200477d"/>
-    <p:sldId xmlns:r="http://schemas.openxmlformats.org/officeDocument/2006/relationships" id="257" r:id="R94e706c14e404b22"/>
-    <p:sldId xmlns:r="http://schemas.openxmlformats.org/officeDocument/2006/relationships" id="258" r:id="R363dc8a282fb42c6"/>
-    <p:sldId xmlns:r="http://schemas.openxmlformats.org/officeDocument/2006/relationships" id="259" r:id="Ra5a42ad7092e4436"/>
-    <p:sldId xmlns:r="http://schemas.openxmlformats.org/officeDocument/2006/relationships" id="260" r:id="R11679b39dd5c49cd"/>
-    <p:sldId xmlns:r="http://schemas.openxmlformats.org/officeDocument/2006/relationships" id="261" r:id="R5830cfc2a6c148a1"/>
-    <p:sldId xmlns:r="http://schemas.openxmlformats.org/officeDocument/2006/relationships" id="262" r:id="R88720190a2484357"/>
-    <p:sldId xmlns:r="http://schemas.openxmlformats.org/officeDocument/2006/relationships" id="263" r:id="Rbeee7e2780ed4dd2"/>
-    <p:sldId xmlns:r="http://schemas.openxmlformats.org/officeDocument/2006/relationships" id="264" r:id="Re10d0d484cf544cd"/>
-    <p:sldId xmlns:r="http://schemas.openxmlformats.org/officeDocument/2006/relationships" id="265" r:id="Raa0789b777494ec4"/>
-    <p:sldId xmlns:r="http://schemas.openxmlformats.org/officeDocument/2006/relationships" id="266" r:id="R332dafb8fb7140b2"/>
-    <p:sldId xmlns:r="http://schemas.openxmlformats.org/officeDocument/2006/relationships" id="267" r:id="R74f5df60054b4b78"/>
+    <p:sldId xmlns:r="http://schemas.openxmlformats.org/officeDocument/2006/relationships" id="256" r:id="Rc163fe961aaf47ca"/>
+    <p:sldId xmlns:r="http://schemas.openxmlformats.org/officeDocument/2006/relationships" id="257" r:id="Re15ca2b79af846c9"/>
+    <p:sldId xmlns:r="http://schemas.openxmlformats.org/officeDocument/2006/relationships" id="258" r:id="Rd93a697b1457453b"/>
+    <p:sldId xmlns:r="http://schemas.openxmlformats.org/officeDocument/2006/relationships" id="259" r:id="Rba7804b0c838414e"/>
+    <p:sldId xmlns:r="http://schemas.openxmlformats.org/officeDocument/2006/relationships" id="260" r:id="Rb1f27403f49f481f"/>
+    <p:sldId xmlns:r="http://schemas.openxmlformats.org/officeDocument/2006/relationships" id="261" r:id="Re688b1e514574021"/>
+    <p:sldId xmlns:r="http://schemas.openxmlformats.org/officeDocument/2006/relationships" id="262" r:id="R017bdc8f6ebb4f83"/>
+    <p:sldId xmlns:r="http://schemas.openxmlformats.org/officeDocument/2006/relationships" id="263" r:id="R698d227cc6eb472e"/>
+    <p:sldId xmlns:r="http://schemas.openxmlformats.org/officeDocument/2006/relationships" id="264" r:id="Ra08a2207b7de4425"/>
+    <p:sldId xmlns:r="http://schemas.openxmlformats.org/officeDocument/2006/relationships" id="265" r:id="Rc06f81f7203a45c7"/>
+    <p:sldId xmlns:r="http://schemas.openxmlformats.org/officeDocument/2006/relationships" id="266" r:id="R2975a392f0a84914"/>
+    <p:sldId xmlns:r="http://schemas.openxmlformats.org/officeDocument/2006/relationships" id="267" r:id="R9c2d126e2397481d"/>
   </p:sldIdLst>
   <p:sldSz cx="12192000" cy="6858000"/>
   <p:notesSz cx="6858000" cy="9144000"/>
@@ -873,7 +873,7 @@
           <a:lstStyle xmlns:a="http://schemas.openxmlformats.org/drawingml/2006/main"/>
           <a:p xmlns:a="http://schemas.openxmlformats.org/drawingml/2006/main">
             <a:r>
-              <a:t>I do. Reveal the question, setup and each calculation stage one click at a time. Pupils watch before copying. Model answer: Area 126 cm2; perimeter 46 cm.</a:t>
+              <a:t>I do. Reveal the question, then reveal each mathematical change one click at a time. Point to the numbers and operation that changed before moving to the next line. Final answer: Area 126 cm2; perimeter 46 cm.</a:t>
             </a:r>
           </a:p>
         </p:txBody>
@@ -1291,7 +1291,7 @@
   </p:cSld>
   <p:clrMap bg1="lt1" tx1="dk1" bg2="lt2" tx2="dk2" accent1="accent1" accent2="accent2" accent3="accent3" accent4="accent4" accent5="accent5" accent6="accent6" hlink="hlink" folHlink="folHlink"/>
   <p:sldLayoutIdLst>
-    <p:sldLayoutId xmlns:r="http://schemas.openxmlformats.org/officeDocument/2006/relationships" id="2147483649" r:id="Re19223fc935d462e"/>
+    <p:sldLayoutId xmlns:r="http://schemas.openxmlformats.org/officeDocument/2006/relationships" id="2147483649" r:id="Rb454e732aef0401d"/>
   </p:sldLayoutIdLst>
   <p:txStyles>
     <p:titleStyle>
@@ -1842,7 +1842,7 @@
           <p:cNvPr id="12" name="">
             <a:extLst xmlns:a="http://schemas.openxmlformats.org/drawingml/2006/main">
               <a:ext uri="{FF2B5EF4-FFF2-40B4-BE49-F238E27FC236}">
-                <a16:creationId xmlns:a16="http://schemas.microsoft.com/office/drawing/2014/main" id="{A5058F6E-0AAD-4677-9563-322CCB67E062}"/>
+                <a16:creationId xmlns:a16="http://schemas.microsoft.com/office/drawing/2014/main" id="{1D984CE1-3F8B-44D4-9415-5DD9CED9CAE8}"/>
               </a:ext>
             </a:extLst>
           </p:cNvPr>
@@ -1874,7 +1874,7 @@
           <p:cNvPr id="2" name="">
             <a:extLst xmlns:a="http://schemas.openxmlformats.org/drawingml/2006/main">
               <a:ext uri="{FF2B5EF4-FFF2-40B4-BE49-F238E27FC236}">
-                <a16:creationId xmlns:a16="http://schemas.microsoft.com/office/drawing/2014/main" id="{C46A553B-996D-4B72-B7C3-340AF9B61529}"/>
+                <a16:creationId xmlns:a16="http://schemas.microsoft.com/office/drawing/2014/main" id="{164B68D9-6143-4AC8-A967-8B03FC78AA5D}"/>
               </a:ext>
             </a:extLst>
           </p:cNvPr>
@@ -1931,7 +1931,7 @@
           <p:cNvPr id="3" name="">
             <a:extLst xmlns:a="http://schemas.openxmlformats.org/drawingml/2006/main">
               <a:ext uri="{FF2B5EF4-FFF2-40B4-BE49-F238E27FC236}">
-                <a16:creationId xmlns:a16="http://schemas.microsoft.com/office/drawing/2014/main" id="{EDBD5A99-B3E9-4A71-89A6-5D3CE2CF1866}"/>
+                <a16:creationId xmlns:a16="http://schemas.microsoft.com/office/drawing/2014/main" id="{AEEB84A2-637B-4875-87DE-7E2D2AC14600}"/>
               </a:ext>
             </a:extLst>
           </p:cNvPr>
@@ -1965,7 +1965,7 @@
           <p:cNvPr id="4" name="">
             <a:extLst xmlns:a="http://schemas.openxmlformats.org/drawingml/2006/main">
               <a:ext uri="{FF2B5EF4-FFF2-40B4-BE49-F238E27FC236}">
-                <a16:creationId xmlns:a16="http://schemas.microsoft.com/office/drawing/2014/main" id="{EE5AC4DA-9225-4790-916B-FAF254C9340A}"/>
+                <a16:creationId xmlns:a16="http://schemas.microsoft.com/office/drawing/2014/main" id="{24DBF099-7DC1-42A3-9978-66F8E453CB2E}"/>
               </a:ext>
             </a:extLst>
           </p:cNvPr>
@@ -2022,7 +2022,7 @@
           <p:cNvPr id="5" name="">
             <a:extLst xmlns:a="http://schemas.openxmlformats.org/drawingml/2006/main">
               <a:ext uri="{FF2B5EF4-FFF2-40B4-BE49-F238E27FC236}">
-                <a16:creationId xmlns:a16="http://schemas.microsoft.com/office/drawing/2014/main" id="{7EE64421-C0D5-476F-87C8-9C19F5A5A988}"/>
+                <a16:creationId xmlns:a16="http://schemas.microsoft.com/office/drawing/2014/main" id="{37F5C7C5-5BE3-4DB7-9FCC-551343673660}"/>
               </a:ext>
             </a:extLst>
           </p:cNvPr>
@@ -2079,7 +2079,7 @@
           <p:cNvPr id="6" name="">
             <a:extLst xmlns:a="http://schemas.openxmlformats.org/drawingml/2006/main">
               <a:ext uri="{FF2B5EF4-FFF2-40B4-BE49-F238E27FC236}">
-                <a16:creationId xmlns:a16="http://schemas.microsoft.com/office/drawing/2014/main" id="{8A79426B-108B-4BCC-95D3-AAC19149BEA3}"/>
+                <a16:creationId xmlns:a16="http://schemas.microsoft.com/office/drawing/2014/main" id="{62DFF155-0FDF-4ECD-B71F-4A2B3D85B2F7}"/>
               </a:ext>
             </a:extLst>
           </p:cNvPr>
@@ -2113,7 +2113,7 @@
           <p:cNvPr id="7" name="">
             <a:extLst xmlns:a="http://schemas.openxmlformats.org/drawingml/2006/main">
               <a:ext uri="{FF2B5EF4-FFF2-40B4-BE49-F238E27FC236}">
-                <a16:creationId xmlns:a16="http://schemas.microsoft.com/office/drawing/2014/main" id="{6C86715E-68EA-495A-8C0D-52E303B53B14}"/>
+                <a16:creationId xmlns:a16="http://schemas.microsoft.com/office/drawing/2014/main" id="{8971830D-2D79-48AE-81E7-AFE0F255F386}"/>
               </a:ext>
             </a:extLst>
           </p:cNvPr>
@@ -2170,7 +2170,7 @@
           <p:cNvPr id="8" name="">
             <a:extLst xmlns:a="http://schemas.openxmlformats.org/drawingml/2006/main">
               <a:ext uri="{FF2B5EF4-FFF2-40B4-BE49-F238E27FC236}">
-                <a16:creationId xmlns:a16="http://schemas.microsoft.com/office/drawing/2014/main" id="{C34F0717-E873-4545-ACA5-AFAE7409CF22}"/>
+                <a16:creationId xmlns:a16="http://schemas.microsoft.com/office/drawing/2014/main" id="{766D9982-24E7-4CB2-BABD-6E64CBF2DE1E}"/>
               </a:ext>
             </a:extLst>
           </p:cNvPr>
@@ -2227,7 +2227,7 @@
           <p:cNvPr id="9" name="">
             <a:extLst xmlns:a="http://schemas.openxmlformats.org/drawingml/2006/main">
               <a:ext uri="{FF2B5EF4-FFF2-40B4-BE49-F238E27FC236}">
-                <a16:creationId xmlns:a16="http://schemas.microsoft.com/office/drawing/2014/main" id="{A3D47496-F3F4-4F58-A747-021C2395DAB6}"/>
+                <a16:creationId xmlns:a16="http://schemas.microsoft.com/office/drawing/2014/main" id="{3343D2A5-DFEA-4E27-998F-DCC189C2958B}"/>
               </a:ext>
             </a:extLst>
           </p:cNvPr>
@@ -2284,7 +2284,7 @@
           <p:cNvPr id="10" name="">
             <a:extLst xmlns:a="http://schemas.openxmlformats.org/drawingml/2006/main">
               <a:ext uri="{FF2B5EF4-FFF2-40B4-BE49-F238E27FC236}">
-                <a16:creationId xmlns:a16="http://schemas.microsoft.com/office/drawing/2014/main" id="{735B0FF6-C3AE-4765-B67C-C2AC782A5E74}"/>
+                <a16:creationId xmlns:a16="http://schemas.microsoft.com/office/drawing/2014/main" id="{82351EF2-88DB-4EF3-B3CA-81EF3255EC6A}"/>
               </a:ext>
             </a:extLst>
           </p:cNvPr>
@@ -2341,7 +2341,7 @@
           <p:cNvPr id="11" name="">
             <a:extLst xmlns:a="http://schemas.openxmlformats.org/drawingml/2006/main">
               <a:ext uri="{FF2B5EF4-FFF2-40B4-BE49-F238E27FC236}">
-                <a16:creationId xmlns:a16="http://schemas.microsoft.com/office/drawing/2014/main" id="{DC93EE11-FECF-44FE-A7F9-0D5ABE10D0FB}"/>
+                <a16:creationId xmlns:a16="http://schemas.microsoft.com/office/drawing/2014/main" id="{71D32708-5D89-47B5-B961-AADDF321FDAF}"/>
               </a:ext>
             </a:extLst>
           </p:cNvPr>
@@ -2396,7 +2396,7 @@
     </p:spTree>
     <p:extLst>
       <p:ext uri="{BB962C8B-B14F-4D97-AF65-F5344CB8AC3E}">
-        <p14:creationId xmlns:p14="http://schemas.microsoft.com/office/powerpoint/2010/main" val="562162058"/>
+        <p14:creationId xmlns:p14="http://schemas.microsoft.com/office/powerpoint/2010/main" val="1797329374"/>
       </p:ext>
     </p:extLst>
   </p:cSld>
@@ -2427,7 +2427,7 @@
           <p:cNvPr id="14" name="">
             <a:extLst xmlns:a="http://schemas.openxmlformats.org/drawingml/2006/main">
               <a:ext uri="{FF2B5EF4-FFF2-40B4-BE49-F238E27FC236}">
-                <a16:creationId xmlns:a16="http://schemas.microsoft.com/office/drawing/2014/main" id="{8CA38178-E021-46F0-BA57-6F7846605534}"/>
+                <a16:creationId xmlns:a16="http://schemas.microsoft.com/office/drawing/2014/main" id="{36D440D3-AC1B-4AA9-8BF8-6DB5FD3C222B}"/>
               </a:ext>
             </a:extLst>
           </p:cNvPr>
@@ -2459,7 +2459,7 @@
           <p:cNvPr id="2" name="">
             <a:extLst xmlns:a="http://schemas.openxmlformats.org/drawingml/2006/main">
               <a:ext uri="{FF2B5EF4-FFF2-40B4-BE49-F238E27FC236}">
-                <a16:creationId xmlns:a16="http://schemas.microsoft.com/office/drawing/2014/main" id="{9DFF2A63-33EC-4F48-9F05-C6BC4AF51CA7}"/>
+                <a16:creationId xmlns:a16="http://schemas.microsoft.com/office/drawing/2014/main" id="{CF473E7E-776E-41E4-A022-2C06F2C55638}"/>
               </a:ext>
             </a:extLst>
           </p:cNvPr>
@@ -2516,7 +2516,7 @@
           <p:cNvPr id="3" name="">
             <a:extLst xmlns:a="http://schemas.openxmlformats.org/drawingml/2006/main">
               <a:ext uri="{FF2B5EF4-FFF2-40B4-BE49-F238E27FC236}">
-                <a16:creationId xmlns:a16="http://schemas.microsoft.com/office/drawing/2014/main" id="{64B44D79-CA7E-4A73-AB3F-21E0BB25D2D3}"/>
+                <a16:creationId xmlns:a16="http://schemas.microsoft.com/office/drawing/2014/main" id="{833A36B1-2D6E-472D-883D-FD0C5D606727}"/>
               </a:ext>
             </a:extLst>
           </p:cNvPr>
@@ -2548,7 +2548,7 @@
           <p:cNvPr id="4" name="">
             <a:extLst xmlns:a="http://schemas.openxmlformats.org/drawingml/2006/main">
               <a:ext uri="{FF2B5EF4-FFF2-40B4-BE49-F238E27FC236}">
-                <a16:creationId xmlns:a16="http://schemas.microsoft.com/office/drawing/2014/main" id="{78C788A8-C4AC-4CC9-963E-79CA7DB47C2F}"/>
+                <a16:creationId xmlns:a16="http://schemas.microsoft.com/office/drawing/2014/main" id="{85FC0F2E-0062-46AB-9913-4692D85DF7F4}"/>
               </a:ext>
             </a:extLst>
           </p:cNvPr>
@@ -2605,7 +2605,7 @@
           <p:cNvPr id="5" name="">
             <a:extLst xmlns:a="http://schemas.openxmlformats.org/drawingml/2006/main">
               <a:ext uri="{FF2B5EF4-FFF2-40B4-BE49-F238E27FC236}">
-                <a16:creationId xmlns:a16="http://schemas.microsoft.com/office/drawing/2014/main" id="{E69E001C-54A7-4177-8D2D-95609FBF0469}"/>
+                <a16:creationId xmlns:a16="http://schemas.microsoft.com/office/drawing/2014/main" id="{BD4DA511-FEAA-430C-BA34-8BD7F8124444}"/>
               </a:ext>
             </a:extLst>
           </p:cNvPr>
@@ -2662,7 +2662,7 @@
           <p:cNvPr id="6" name="">
             <a:extLst xmlns:a="http://schemas.openxmlformats.org/drawingml/2006/main">
               <a:ext uri="{FF2B5EF4-FFF2-40B4-BE49-F238E27FC236}">
-                <a16:creationId xmlns:a16="http://schemas.microsoft.com/office/drawing/2014/main" id="{1612242F-DC2C-4945-BAD6-256DF8AB35EC}"/>
+                <a16:creationId xmlns:a16="http://schemas.microsoft.com/office/drawing/2014/main" id="{A416525A-E7EC-4384-AFF5-CC61596356EE}"/>
               </a:ext>
             </a:extLst>
           </p:cNvPr>
@@ -2719,7 +2719,7 @@
           <p:cNvPr id="7" name="">
             <a:extLst xmlns:a="http://schemas.openxmlformats.org/drawingml/2006/main">
               <a:ext uri="{FF2B5EF4-FFF2-40B4-BE49-F238E27FC236}">
-                <a16:creationId xmlns:a16="http://schemas.microsoft.com/office/drawing/2014/main" id="{56F5CD3B-97CB-417E-A2C2-625637EECF1B}"/>
+                <a16:creationId xmlns:a16="http://schemas.microsoft.com/office/drawing/2014/main" id="{AF8195EB-5C34-452B-AB70-BDC0433DF54A}"/>
               </a:ext>
             </a:extLst>
           </p:cNvPr>
@@ -2751,7 +2751,7 @@
           <p:cNvPr id="8" name="">
             <a:extLst xmlns:a="http://schemas.openxmlformats.org/drawingml/2006/main">
               <a:ext uri="{FF2B5EF4-FFF2-40B4-BE49-F238E27FC236}">
-                <a16:creationId xmlns:a16="http://schemas.microsoft.com/office/drawing/2014/main" id="{FDEA4137-1714-4893-956C-ECDA4D57FBAD}"/>
+                <a16:creationId xmlns:a16="http://schemas.microsoft.com/office/drawing/2014/main" id="{D57C4B4D-5F28-44C0-9472-3F7CD010C1C5}"/>
               </a:ext>
             </a:extLst>
           </p:cNvPr>
@@ -2808,7 +2808,7 @@
           <p:cNvPr id="9" name="">
             <a:extLst xmlns:a="http://schemas.openxmlformats.org/drawingml/2006/main">
               <a:ext uri="{FF2B5EF4-FFF2-40B4-BE49-F238E27FC236}">
-                <a16:creationId xmlns:a16="http://schemas.microsoft.com/office/drawing/2014/main" id="{32C6925D-AE0B-4823-92EE-F9F30ED84C49}"/>
+                <a16:creationId xmlns:a16="http://schemas.microsoft.com/office/drawing/2014/main" id="{F6C608CB-D9AB-4F42-96F8-C1CF01BD58D3}"/>
               </a:ext>
             </a:extLst>
           </p:cNvPr>
@@ -2865,7 +2865,7 @@
           <p:cNvPr id="10" name="">
             <a:extLst xmlns:a="http://schemas.openxmlformats.org/drawingml/2006/main">
               <a:ext uri="{FF2B5EF4-FFF2-40B4-BE49-F238E27FC236}">
-                <a16:creationId xmlns:a16="http://schemas.microsoft.com/office/drawing/2014/main" id="{00FC116E-74CF-4037-966A-9EDFA78E33F7}"/>
+                <a16:creationId xmlns:a16="http://schemas.microsoft.com/office/drawing/2014/main" id="{81212EC9-FA75-4637-8C54-EC6C2D17A872}"/>
               </a:ext>
             </a:extLst>
           </p:cNvPr>
@@ -2922,7 +2922,7 @@
           <p:cNvPr id="11" name="">
             <a:extLst xmlns:a="http://schemas.openxmlformats.org/drawingml/2006/main">
               <a:ext uri="{FF2B5EF4-FFF2-40B4-BE49-F238E27FC236}">
-                <a16:creationId xmlns:a16="http://schemas.microsoft.com/office/drawing/2014/main" id="{1E5C6EFF-61FB-4A4B-921A-B0A60ACE7592}"/>
+                <a16:creationId xmlns:a16="http://schemas.microsoft.com/office/drawing/2014/main" id="{23AB5BEA-8A23-43B4-B069-42DA1E74DEAB}"/>
               </a:ext>
             </a:extLst>
           </p:cNvPr>
@@ -2979,7 +2979,7 @@
           <p:cNvPr id="12" name="">
             <a:extLst xmlns:a="http://schemas.openxmlformats.org/drawingml/2006/main">
               <a:ext uri="{FF2B5EF4-FFF2-40B4-BE49-F238E27FC236}">
-                <a16:creationId xmlns:a16="http://schemas.microsoft.com/office/drawing/2014/main" id="{D9332E88-E70B-44BE-BD07-4ADFA6458532}"/>
+                <a16:creationId xmlns:a16="http://schemas.microsoft.com/office/drawing/2014/main" id="{F0DD3876-CCBB-4C60-AA12-C59BF9734E48}"/>
               </a:ext>
             </a:extLst>
           </p:cNvPr>
@@ -3036,7 +3036,7 @@
           <p:cNvPr id="13" name="">
             <a:extLst xmlns:a="http://schemas.openxmlformats.org/drawingml/2006/main">
               <a:ext uri="{FF2B5EF4-FFF2-40B4-BE49-F238E27FC236}">
-                <a16:creationId xmlns:a16="http://schemas.microsoft.com/office/drawing/2014/main" id="{9CC8765A-013B-4E29-92B7-4E6134113E5D}"/>
+                <a16:creationId xmlns:a16="http://schemas.microsoft.com/office/drawing/2014/main" id="{47F45371-D3C6-492B-9819-FC152F2680C6}"/>
               </a:ext>
             </a:extLst>
           </p:cNvPr>
@@ -3091,7 +3091,7 @@
     </p:spTree>
     <p:extLst>
       <p:ext uri="{BB962C8B-B14F-4D97-AF65-F5344CB8AC3E}">
-        <p14:creationId xmlns:p14="http://schemas.microsoft.com/office/powerpoint/2010/main" val="14154123"/>
+        <p14:creationId xmlns:p14="http://schemas.microsoft.com/office/powerpoint/2010/main" val="752825832"/>
       </p:ext>
     </p:extLst>
   </p:cSld>
@@ -3292,7 +3292,7 @@
           <p:cNvPr id="19" name="">
             <a:extLst xmlns:a="http://schemas.openxmlformats.org/drawingml/2006/main">
               <a:ext uri="{FF2B5EF4-FFF2-40B4-BE49-F238E27FC236}">
-                <a16:creationId xmlns:a16="http://schemas.microsoft.com/office/drawing/2014/main" id="{C2F252C8-BCA3-49BC-BE52-F1126E7EE2DB}"/>
+                <a16:creationId xmlns:a16="http://schemas.microsoft.com/office/drawing/2014/main" id="{503354E3-76E5-4EEF-A77F-21CA78B6E897}"/>
               </a:ext>
             </a:extLst>
           </p:cNvPr>
@@ -3324,7 +3324,7 @@
           <p:cNvPr id="2" name="">
             <a:extLst xmlns:a="http://schemas.openxmlformats.org/drawingml/2006/main">
               <a:ext uri="{FF2B5EF4-FFF2-40B4-BE49-F238E27FC236}">
-                <a16:creationId xmlns:a16="http://schemas.microsoft.com/office/drawing/2014/main" id="{A9CE5041-D55F-45C7-95E5-87ADF3661748}"/>
+                <a16:creationId xmlns:a16="http://schemas.microsoft.com/office/drawing/2014/main" id="{3192BA26-C5D2-405A-9903-B606EE7A05F9}"/>
               </a:ext>
             </a:extLst>
           </p:cNvPr>
@@ -3381,7 +3381,7 @@
           <p:cNvPr id="3" name="">
             <a:extLst xmlns:a="http://schemas.openxmlformats.org/drawingml/2006/main">
               <a:ext uri="{FF2B5EF4-FFF2-40B4-BE49-F238E27FC236}">
-                <a16:creationId xmlns:a16="http://schemas.microsoft.com/office/drawing/2014/main" id="{955FA013-D558-4DE9-88B1-43045D10C6AD}"/>
+                <a16:creationId xmlns:a16="http://schemas.microsoft.com/office/drawing/2014/main" id="{6F49EFC1-66A2-49E4-8187-BBEC373EF957}"/>
               </a:ext>
             </a:extLst>
           </p:cNvPr>
@@ -3413,7 +3413,7 @@
           <p:cNvPr id="4" name="">
             <a:extLst xmlns:a="http://schemas.openxmlformats.org/drawingml/2006/main">
               <a:ext uri="{FF2B5EF4-FFF2-40B4-BE49-F238E27FC236}">
-                <a16:creationId xmlns:a16="http://schemas.microsoft.com/office/drawing/2014/main" id="{FCC063CF-03BC-42C7-BE49-89FF6729D516}"/>
+                <a16:creationId xmlns:a16="http://schemas.microsoft.com/office/drawing/2014/main" id="{43C97A95-E43D-4B6B-8EB4-B6E94B18F045}"/>
               </a:ext>
             </a:extLst>
           </p:cNvPr>
@@ -3470,7 +3470,7 @@
           <p:cNvPr id="5" name="">
             <a:extLst xmlns:a="http://schemas.openxmlformats.org/drawingml/2006/main">
               <a:ext uri="{FF2B5EF4-FFF2-40B4-BE49-F238E27FC236}">
-                <a16:creationId xmlns:a16="http://schemas.microsoft.com/office/drawing/2014/main" id="{CDCC616C-0087-40A2-936E-78699CF51018}"/>
+                <a16:creationId xmlns:a16="http://schemas.microsoft.com/office/drawing/2014/main" id="{AC4AEB39-730A-4073-AB53-564BDC8E80EA}"/>
               </a:ext>
             </a:extLst>
           </p:cNvPr>
@@ -3527,7 +3527,7 @@
           <p:cNvPr id="6" name="">
             <a:extLst xmlns:a="http://schemas.openxmlformats.org/drawingml/2006/main">
               <a:ext uri="{FF2B5EF4-FFF2-40B4-BE49-F238E27FC236}">
-                <a16:creationId xmlns:a16="http://schemas.microsoft.com/office/drawing/2014/main" id="{E540F6B5-FA8F-47FF-A6E9-44A65138492A}"/>
+                <a16:creationId xmlns:a16="http://schemas.microsoft.com/office/drawing/2014/main" id="{86753659-0C79-4D71-B05D-F8C19BC99DF8}"/>
               </a:ext>
             </a:extLst>
           </p:cNvPr>
@@ -3584,7 +3584,7 @@
           <p:cNvPr id="7" name="">
             <a:extLst xmlns:a="http://schemas.openxmlformats.org/drawingml/2006/main">
               <a:ext uri="{FF2B5EF4-FFF2-40B4-BE49-F238E27FC236}">
-                <a16:creationId xmlns:a16="http://schemas.microsoft.com/office/drawing/2014/main" id="{0A943F5E-C130-49A9-B0FB-E192998A8E56}"/>
+                <a16:creationId xmlns:a16="http://schemas.microsoft.com/office/drawing/2014/main" id="{25DD8901-D637-4299-BF8F-490E12590528}"/>
               </a:ext>
             </a:extLst>
           </p:cNvPr>
@@ -3616,7 +3616,7 @@
           <p:cNvPr id="8" name="">
             <a:extLst xmlns:a="http://schemas.openxmlformats.org/drawingml/2006/main">
               <a:ext uri="{FF2B5EF4-FFF2-40B4-BE49-F238E27FC236}">
-                <a16:creationId xmlns:a16="http://schemas.microsoft.com/office/drawing/2014/main" id="{CD1C37E1-DA2D-4578-9125-DB2E7E8CD52A}"/>
+                <a16:creationId xmlns:a16="http://schemas.microsoft.com/office/drawing/2014/main" id="{F5204771-CC0C-430B-98B5-E7C1BCD25549}"/>
               </a:ext>
             </a:extLst>
           </p:cNvPr>
@@ -3673,7 +3673,7 @@
           <p:cNvPr id="9" name="">
             <a:extLst xmlns:a="http://schemas.openxmlformats.org/drawingml/2006/main">
               <a:ext uri="{FF2B5EF4-FFF2-40B4-BE49-F238E27FC236}">
-                <a16:creationId xmlns:a16="http://schemas.microsoft.com/office/drawing/2014/main" id="{B860F149-5F9C-42E3-8D86-836F90FC6E9A}"/>
+                <a16:creationId xmlns:a16="http://schemas.microsoft.com/office/drawing/2014/main" id="{B05B102B-3C9D-4A18-9C94-512C6ABFE727}"/>
               </a:ext>
             </a:extLst>
           </p:cNvPr>
@@ -3730,7 +3730,7 @@
           <p:cNvPr id="10" name="">
             <a:extLst xmlns:a="http://schemas.openxmlformats.org/drawingml/2006/main">
               <a:ext uri="{FF2B5EF4-FFF2-40B4-BE49-F238E27FC236}">
-                <a16:creationId xmlns:a16="http://schemas.microsoft.com/office/drawing/2014/main" id="{58F18B45-DD60-4ACA-8F55-18D57E04ED43}"/>
+                <a16:creationId xmlns:a16="http://schemas.microsoft.com/office/drawing/2014/main" id="{CB7E2BD3-6B39-42A8-908A-64B1B3FF8AEA}"/>
               </a:ext>
             </a:extLst>
           </p:cNvPr>
@@ -3787,7 +3787,7 @@
           <p:cNvPr id="11" name="">
             <a:extLst xmlns:a="http://schemas.openxmlformats.org/drawingml/2006/main">
               <a:ext uri="{FF2B5EF4-FFF2-40B4-BE49-F238E27FC236}">
-                <a16:creationId xmlns:a16="http://schemas.microsoft.com/office/drawing/2014/main" id="{285F8692-6E6F-47B1-A8AC-B95706BB6BA0}"/>
+                <a16:creationId xmlns:a16="http://schemas.microsoft.com/office/drawing/2014/main" id="{9893F308-7040-4E60-A770-4FDF779E79AB}"/>
               </a:ext>
             </a:extLst>
           </p:cNvPr>
@@ -3821,7 +3821,7 @@
           <p:cNvPr id="12" name="">
             <a:extLst xmlns:a="http://schemas.openxmlformats.org/drawingml/2006/main">
               <a:ext uri="{FF2B5EF4-FFF2-40B4-BE49-F238E27FC236}">
-                <a16:creationId xmlns:a16="http://schemas.microsoft.com/office/drawing/2014/main" id="{8CA6260B-C63C-4258-AA32-E59D91E25A5B}"/>
+                <a16:creationId xmlns:a16="http://schemas.microsoft.com/office/drawing/2014/main" id="{F819B239-2AAA-468D-94E3-717FC5117837}"/>
               </a:ext>
             </a:extLst>
           </p:cNvPr>
@@ -3878,7 +3878,7 @@
           <p:cNvPr id="13" name="">
             <a:extLst xmlns:a="http://schemas.openxmlformats.org/drawingml/2006/main">
               <a:ext uri="{FF2B5EF4-FFF2-40B4-BE49-F238E27FC236}">
-                <a16:creationId xmlns:a16="http://schemas.microsoft.com/office/drawing/2014/main" id="{30B243AC-CB2D-4558-BB02-0F0D6ABE8A03}"/>
+                <a16:creationId xmlns:a16="http://schemas.microsoft.com/office/drawing/2014/main" id="{76695C1D-7015-401F-BEE7-A7E814C8D97F}"/>
               </a:ext>
             </a:extLst>
           </p:cNvPr>
@@ -3935,7 +3935,7 @@
           <p:cNvPr id="14" name="">
             <a:extLst xmlns:a="http://schemas.openxmlformats.org/drawingml/2006/main">
               <a:ext uri="{FF2B5EF4-FFF2-40B4-BE49-F238E27FC236}">
-                <a16:creationId xmlns:a16="http://schemas.microsoft.com/office/drawing/2014/main" id="{75A470F2-FC61-4B7C-8831-4FF359A48B34}"/>
+                <a16:creationId xmlns:a16="http://schemas.microsoft.com/office/drawing/2014/main" id="{65039A27-3884-498B-AE1D-639431040937}"/>
               </a:ext>
             </a:extLst>
           </p:cNvPr>
@@ -3992,7 +3992,7 @@
           <p:cNvPr id="15" name="">
             <a:extLst xmlns:a="http://schemas.openxmlformats.org/drawingml/2006/main">
               <a:ext uri="{FF2B5EF4-FFF2-40B4-BE49-F238E27FC236}">
-                <a16:creationId xmlns:a16="http://schemas.microsoft.com/office/drawing/2014/main" id="{4F3DA8F9-16ED-4017-8216-E7285118F20D}"/>
+                <a16:creationId xmlns:a16="http://schemas.microsoft.com/office/drawing/2014/main" id="{2392EF9C-E419-4069-9A76-C944092C6451}"/>
               </a:ext>
             </a:extLst>
           </p:cNvPr>
@@ -4026,7 +4026,7 @@
           <p:cNvPr id="16" name="">
             <a:extLst xmlns:a="http://schemas.openxmlformats.org/drawingml/2006/main">
               <a:ext uri="{FF2B5EF4-FFF2-40B4-BE49-F238E27FC236}">
-                <a16:creationId xmlns:a16="http://schemas.microsoft.com/office/drawing/2014/main" id="{C0467A81-6627-4C22-929B-4F43A92658B7}"/>
+                <a16:creationId xmlns:a16="http://schemas.microsoft.com/office/drawing/2014/main" id="{B49CE33F-D214-43C2-BB88-DFDFA432B646}"/>
               </a:ext>
             </a:extLst>
           </p:cNvPr>
@@ -4083,7 +4083,7 @@
           <p:cNvPr id="17" name="">
             <a:extLst xmlns:a="http://schemas.openxmlformats.org/drawingml/2006/main">
               <a:ext uri="{FF2B5EF4-FFF2-40B4-BE49-F238E27FC236}">
-                <a16:creationId xmlns:a16="http://schemas.microsoft.com/office/drawing/2014/main" id="{104A3FAD-B16B-4091-8519-1DDA1668CF0B}"/>
+                <a16:creationId xmlns:a16="http://schemas.microsoft.com/office/drawing/2014/main" id="{CEFFD393-6C49-42F2-9027-AE15922A0CE8}"/>
               </a:ext>
             </a:extLst>
           </p:cNvPr>
@@ -4140,7 +4140,7 @@
           <p:cNvPr id="18" name="">
             <a:extLst xmlns:a="http://schemas.openxmlformats.org/drawingml/2006/main">
               <a:ext uri="{FF2B5EF4-FFF2-40B4-BE49-F238E27FC236}">
-                <a16:creationId xmlns:a16="http://schemas.microsoft.com/office/drawing/2014/main" id="{723553B0-4667-4436-A290-C0206431E77E}"/>
+                <a16:creationId xmlns:a16="http://schemas.microsoft.com/office/drawing/2014/main" id="{286E48FF-8FE4-4DA2-B7C1-90BA883ECC6B}"/>
               </a:ext>
             </a:extLst>
           </p:cNvPr>
@@ -4195,7 +4195,7 @@
     </p:spTree>
     <p:extLst>
       <p:ext uri="{BB962C8B-B14F-4D97-AF65-F5344CB8AC3E}">
-        <p14:creationId xmlns:p14="http://schemas.microsoft.com/office/powerpoint/2010/main" val="1266579905"/>
+        <p14:creationId xmlns:p14="http://schemas.microsoft.com/office/powerpoint/2010/main" val="303702148"/>
       </p:ext>
     </p:extLst>
   </p:cSld>
@@ -4350,7 +4350,7 @@
           <p:cNvPr id="23" name="">
             <a:extLst xmlns:a="http://schemas.openxmlformats.org/drawingml/2006/main">
               <a:ext uri="{FF2B5EF4-FFF2-40B4-BE49-F238E27FC236}">
-                <a16:creationId xmlns:a16="http://schemas.microsoft.com/office/drawing/2014/main" id="{E6B32EB7-B93F-4BCF-B06E-1AED172DBCF6}"/>
+                <a16:creationId xmlns:a16="http://schemas.microsoft.com/office/drawing/2014/main" id="{85532E39-4961-45B2-9B08-4634D5FB9DD8}"/>
               </a:ext>
             </a:extLst>
           </p:cNvPr>
@@ -4382,7 +4382,7 @@
           <p:cNvPr id="2" name="">
             <a:extLst xmlns:a="http://schemas.openxmlformats.org/drawingml/2006/main">
               <a:ext uri="{FF2B5EF4-FFF2-40B4-BE49-F238E27FC236}">
-                <a16:creationId xmlns:a16="http://schemas.microsoft.com/office/drawing/2014/main" id="{6AE0BE0E-7209-4F6F-A4CA-0A15B677B7D1}"/>
+                <a16:creationId xmlns:a16="http://schemas.microsoft.com/office/drawing/2014/main" id="{1D160BA7-E2D2-483C-9523-37C4D2EF3572}"/>
               </a:ext>
             </a:extLst>
           </p:cNvPr>
@@ -4439,7 +4439,7 @@
           <p:cNvPr id="3" name="">
             <a:extLst xmlns:a="http://schemas.openxmlformats.org/drawingml/2006/main">
               <a:ext uri="{FF2B5EF4-FFF2-40B4-BE49-F238E27FC236}">
-                <a16:creationId xmlns:a16="http://schemas.microsoft.com/office/drawing/2014/main" id="{87CBB70D-2ED9-4B5E-8F7F-325DB01710CE}"/>
+                <a16:creationId xmlns:a16="http://schemas.microsoft.com/office/drawing/2014/main" id="{97CDA32E-462C-4828-95DF-2B710EA75CF3}"/>
               </a:ext>
             </a:extLst>
           </p:cNvPr>
@@ -4471,7 +4471,7 @@
           <p:cNvPr id="4" name="">
             <a:extLst xmlns:a="http://schemas.openxmlformats.org/drawingml/2006/main">
               <a:ext uri="{FF2B5EF4-FFF2-40B4-BE49-F238E27FC236}">
-                <a16:creationId xmlns:a16="http://schemas.microsoft.com/office/drawing/2014/main" id="{AB0A518A-2B28-48DB-BB2C-567743C04238}"/>
+                <a16:creationId xmlns:a16="http://schemas.microsoft.com/office/drawing/2014/main" id="{C62161A4-B697-41E0-A2BD-3C5C47AA35B6}"/>
               </a:ext>
             </a:extLst>
           </p:cNvPr>
@@ -4528,7 +4528,7 @@
           <p:cNvPr id="5" name="">
             <a:extLst xmlns:a="http://schemas.openxmlformats.org/drawingml/2006/main">
               <a:ext uri="{FF2B5EF4-FFF2-40B4-BE49-F238E27FC236}">
-                <a16:creationId xmlns:a16="http://schemas.microsoft.com/office/drawing/2014/main" id="{ADD5846D-EBE7-4C02-A226-C33C40C6D618}"/>
+                <a16:creationId xmlns:a16="http://schemas.microsoft.com/office/drawing/2014/main" id="{F303DB39-F01D-42A7-9E05-F5F75AA151CA}"/>
               </a:ext>
             </a:extLst>
           </p:cNvPr>
@@ -4585,7 +4585,7 @@
           <p:cNvPr id="6" name="">
             <a:extLst xmlns:a="http://schemas.openxmlformats.org/drawingml/2006/main">
               <a:ext uri="{FF2B5EF4-FFF2-40B4-BE49-F238E27FC236}">
-                <a16:creationId xmlns:a16="http://schemas.microsoft.com/office/drawing/2014/main" id="{3E9566EB-8D91-4FB0-8069-CD890689DA7B}"/>
+                <a16:creationId xmlns:a16="http://schemas.microsoft.com/office/drawing/2014/main" id="{F54D9382-FE30-4995-A1A5-B85887AB642A}"/>
               </a:ext>
             </a:extLst>
           </p:cNvPr>
@@ -4642,7 +4642,7 @@
           <p:cNvPr id="7" name="">
             <a:extLst xmlns:a="http://schemas.openxmlformats.org/drawingml/2006/main">
               <a:ext uri="{FF2B5EF4-FFF2-40B4-BE49-F238E27FC236}">
-                <a16:creationId xmlns:a16="http://schemas.microsoft.com/office/drawing/2014/main" id="{FE695190-62B3-44A5-88D9-CC30AADCD196}"/>
+                <a16:creationId xmlns:a16="http://schemas.microsoft.com/office/drawing/2014/main" id="{9804FC65-6D18-44D8-BFDF-3FA44C6457E1}"/>
               </a:ext>
             </a:extLst>
           </p:cNvPr>
@@ -4674,7 +4674,7 @@
           <p:cNvPr id="8" name="">
             <a:extLst xmlns:a="http://schemas.openxmlformats.org/drawingml/2006/main">
               <a:ext uri="{FF2B5EF4-FFF2-40B4-BE49-F238E27FC236}">
-                <a16:creationId xmlns:a16="http://schemas.microsoft.com/office/drawing/2014/main" id="{EB555F8E-0E75-46BE-B31E-9507AE14C5E6}"/>
+                <a16:creationId xmlns:a16="http://schemas.microsoft.com/office/drawing/2014/main" id="{0CD70907-6CFF-4E45-A92A-3E0A3071259C}"/>
               </a:ext>
             </a:extLst>
           </p:cNvPr>
@@ -4731,7 +4731,7 @@
           <p:cNvPr id="9" name="">
             <a:extLst xmlns:a="http://schemas.openxmlformats.org/drawingml/2006/main">
               <a:ext uri="{FF2B5EF4-FFF2-40B4-BE49-F238E27FC236}">
-                <a16:creationId xmlns:a16="http://schemas.microsoft.com/office/drawing/2014/main" id="{57B26828-771E-4149-A73B-3669F26F42DE}"/>
+                <a16:creationId xmlns:a16="http://schemas.microsoft.com/office/drawing/2014/main" id="{32C0F231-D779-45EE-BF62-8B7B014EFAA2}"/>
               </a:ext>
             </a:extLst>
           </p:cNvPr>
@@ -4788,7 +4788,7 @@
           <p:cNvPr id="10" name="">
             <a:extLst xmlns:a="http://schemas.openxmlformats.org/drawingml/2006/main">
               <a:ext uri="{FF2B5EF4-FFF2-40B4-BE49-F238E27FC236}">
-                <a16:creationId xmlns:a16="http://schemas.microsoft.com/office/drawing/2014/main" id="{775EB20F-0379-42EE-8E76-021A87D24623}"/>
+                <a16:creationId xmlns:a16="http://schemas.microsoft.com/office/drawing/2014/main" id="{08FF31F1-6C1C-4CE2-A928-1161392EED5F}"/>
               </a:ext>
             </a:extLst>
           </p:cNvPr>
@@ -4822,7 +4822,7 @@
           <p:cNvPr id="11" name="">
             <a:extLst xmlns:a="http://schemas.openxmlformats.org/drawingml/2006/main">
               <a:ext uri="{FF2B5EF4-FFF2-40B4-BE49-F238E27FC236}">
-                <a16:creationId xmlns:a16="http://schemas.microsoft.com/office/drawing/2014/main" id="{7ACB7275-CFF0-447B-8CEC-C40185ABA0C4}"/>
+                <a16:creationId xmlns:a16="http://schemas.microsoft.com/office/drawing/2014/main" id="{8A07F131-5877-4F27-8E2C-C8F896AB6696}"/>
               </a:ext>
             </a:extLst>
           </p:cNvPr>
@@ -4854,7 +4854,7 @@
           <p:cNvPr id="12" name="">
             <a:extLst xmlns:a="http://schemas.openxmlformats.org/drawingml/2006/main">
               <a:ext uri="{FF2B5EF4-FFF2-40B4-BE49-F238E27FC236}">
-                <a16:creationId xmlns:a16="http://schemas.microsoft.com/office/drawing/2014/main" id="{FF60DEC6-52AA-4768-93C6-AB74E300CBF2}"/>
+                <a16:creationId xmlns:a16="http://schemas.microsoft.com/office/drawing/2014/main" id="{36AD3314-388D-48B7-9A63-E9A6047C06EA}"/>
               </a:ext>
             </a:extLst>
           </p:cNvPr>
@@ -4911,7 +4911,7 @@
           <p:cNvPr id="13" name="">
             <a:extLst xmlns:a="http://schemas.openxmlformats.org/drawingml/2006/main">
               <a:ext uri="{FF2B5EF4-FFF2-40B4-BE49-F238E27FC236}">
-                <a16:creationId xmlns:a16="http://schemas.microsoft.com/office/drawing/2014/main" id="{0FB929C9-90DB-4AC0-A1A4-64A0C4F93A80}"/>
+                <a16:creationId xmlns:a16="http://schemas.microsoft.com/office/drawing/2014/main" id="{8F1A6591-7C3D-4FA2-9276-001721C2C1CE}"/>
               </a:ext>
             </a:extLst>
           </p:cNvPr>
@@ -4968,7 +4968,7 @@
           <p:cNvPr id="14" name="">
             <a:extLst xmlns:a="http://schemas.openxmlformats.org/drawingml/2006/main">
               <a:ext uri="{FF2B5EF4-FFF2-40B4-BE49-F238E27FC236}">
-                <a16:creationId xmlns:a16="http://schemas.microsoft.com/office/drawing/2014/main" id="{A85BE12F-31AC-47B2-ACD0-7C041D251FED}"/>
+                <a16:creationId xmlns:a16="http://schemas.microsoft.com/office/drawing/2014/main" id="{18C08976-E020-4140-BFE2-17079E1C1589}"/>
               </a:ext>
             </a:extLst>
           </p:cNvPr>
@@ -5002,7 +5002,7 @@
           <p:cNvPr id="15" name="">
             <a:extLst xmlns:a="http://schemas.openxmlformats.org/drawingml/2006/main">
               <a:ext uri="{FF2B5EF4-FFF2-40B4-BE49-F238E27FC236}">
-                <a16:creationId xmlns:a16="http://schemas.microsoft.com/office/drawing/2014/main" id="{544ADB7E-98E4-4C81-A4BC-F37E492B8D73}"/>
+                <a16:creationId xmlns:a16="http://schemas.microsoft.com/office/drawing/2014/main" id="{48E8992F-9C49-4D16-9BB9-543C63AC72C9}"/>
               </a:ext>
             </a:extLst>
           </p:cNvPr>
@@ -5034,7 +5034,7 @@
           <p:cNvPr id="16" name="">
             <a:extLst xmlns:a="http://schemas.openxmlformats.org/drawingml/2006/main">
               <a:ext uri="{FF2B5EF4-FFF2-40B4-BE49-F238E27FC236}">
-                <a16:creationId xmlns:a16="http://schemas.microsoft.com/office/drawing/2014/main" id="{761ECAA9-1621-4CA2-BA2A-10C970C99289}"/>
+                <a16:creationId xmlns:a16="http://schemas.microsoft.com/office/drawing/2014/main" id="{2748D8F8-A1D2-4639-8029-9FF5BE0CE517}"/>
               </a:ext>
             </a:extLst>
           </p:cNvPr>
@@ -5091,7 +5091,7 @@
           <p:cNvPr id="17" name="">
             <a:extLst xmlns:a="http://schemas.openxmlformats.org/drawingml/2006/main">
               <a:ext uri="{FF2B5EF4-FFF2-40B4-BE49-F238E27FC236}">
-                <a16:creationId xmlns:a16="http://schemas.microsoft.com/office/drawing/2014/main" id="{FB8DF841-AE0D-4FF7-BC16-11BB428D7AA4}"/>
+                <a16:creationId xmlns:a16="http://schemas.microsoft.com/office/drawing/2014/main" id="{5AD200CF-3EC9-42F8-9E8E-0CBB1A81971B}"/>
               </a:ext>
             </a:extLst>
           </p:cNvPr>
@@ -5148,7 +5148,7 @@
           <p:cNvPr id="18" name="">
             <a:extLst xmlns:a="http://schemas.openxmlformats.org/drawingml/2006/main">
               <a:ext uri="{FF2B5EF4-FFF2-40B4-BE49-F238E27FC236}">
-                <a16:creationId xmlns:a16="http://schemas.microsoft.com/office/drawing/2014/main" id="{A983AE4E-AD4F-4FAD-9B6F-38143B50087B}"/>
+                <a16:creationId xmlns:a16="http://schemas.microsoft.com/office/drawing/2014/main" id="{ED618DA5-A84A-4B99-9D13-90BD21D5EED1}"/>
               </a:ext>
             </a:extLst>
           </p:cNvPr>
@@ -5182,7 +5182,7 @@
           <p:cNvPr id="19" name="">
             <a:extLst xmlns:a="http://schemas.openxmlformats.org/drawingml/2006/main">
               <a:ext uri="{FF2B5EF4-FFF2-40B4-BE49-F238E27FC236}">
-                <a16:creationId xmlns:a16="http://schemas.microsoft.com/office/drawing/2014/main" id="{2BFAFA17-BF86-4399-829C-977B842E8391}"/>
+                <a16:creationId xmlns:a16="http://schemas.microsoft.com/office/drawing/2014/main" id="{CE6661C2-D201-444E-8C3C-98CDF60D2C1C}"/>
               </a:ext>
             </a:extLst>
           </p:cNvPr>
@@ -5214,7 +5214,7 @@
           <p:cNvPr id="20" name="">
             <a:extLst xmlns:a="http://schemas.openxmlformats.org/drawingml/2006/main">
               <a:ext uri="{FF2B5EF4-FFF2-40B4-BE49-F238E27FC236}">
-                <a16:creationId xmlns:a16="http://schemas.microsoft.com/office/drawing/2014/main" id="{FA14004F-E941-43B7-A127-D8EF83E8C0A0}"/>
+                <a16:creationId xmlns:a16="http://schemas.microsoft.com/office/drawing/2014/main" id="{14F2FF53-98E6-4C14-98DE-7B5FA56415AD}"/>
               </a:ext>
             </a:extLst>
           </p:cNvPr>
@@ -5271,7 +5271,7 @@
           <p:cNvPr id="21" name="">
             <a:extLst xmlns:a="http://schemas.openxmlformats.org/drawingml/2006/main">
               <a:ext uri="{FF2B5EF4-FFF2-40B4-BE49-F238E27FC236}">
-                <a16:creationId xmlns:a16="http://schemas.microsoft.com/office/drawing/2014/main" id="{342C1264-0F22-4012-B735-9FB89EB8F9E6}"/>
+                <a16:creationId xmlns:a16="http://schemas.microsoft.com/office/drawing/2014/main" id="{83493E45-45AD-481A-9256-A3FF80285A44}"/>
               </a:ext>
             </a:extLst>
           </p:cNvPr>
@@ -5328,7 +5328,7 @@
           <p:cNvPr id="22" name="">
             <a:extLst xmlns:a="http://schemas.openxmlformats.org/drawingml/2006/main">
               <a:ext uri="{FF2B5EF4-FFF2-40B4-BE49-F238E27FC236}">
-                <a16:creationId xmlns:a16="http://schemas.microsoft.com/office/drawing/2014/main" id="{63D2D721-EF85-4011-B30D-9DE7EC6D122B}"/>
+                <a16:creationId xmlns:a16="http://schemas.microsoft.com/office/drawing/2014/main" id="{422B0F26-DF73-4404-891F-A1D1ED59B5C3}"/>
               </a:ext>
             </a:extLst>
           </p:cNvPr>
@@ -5383,7 +5383,7 @@
     </p:spTree>
     <p:extLst>
       <p:ext uri="{BB962C8B-B14F-4D97-AF65-F5344CB8AC3E}">
-        <p14:creationId xmlns:p14="http://schemas.microsoft.com/office/powerpoint/2010/main" val="1736677975"/>
+        <p14:creationId xmlns:p14="http://schemas.microsoft.com/office/powerpoint/2010/main" val="236430945"/>
       </p:ext>
     </p:extLst>
   </p:cSld>
@@ -5584,7 +5584,7 @@
           <p:cNvPr id="23" name="">
             <a:extLst xmlns:a="http://schemas.openxmlformats.org/drawingml/2006/main">
               <a:ext uri="{FF2B5EF4-FFF2-40B4-BE49-F238E27FC236}">
-                <a16:creationId xmlns:a16="http://schemas.microsoft.com/office/drawing/2014/main" id="{0CC127AA-0C51-45EC-8F62-FCDBCD3F70EE}"/>
+                <a16:creationId xmlns:a16="http://schemas.microsoft.com/office/drawing/2014/main" id="{D68A8502-0F7C-4384-BC44-2A74151A7248}"/>
               </a:ext>
             </a:extLst>
           </p:cNvPr>
@@ -5616,7 +5616,7 @@
           <p:cNvPr id="2" name="">
             <a:extLst xmlns:a="http://schemas.openxmlformats.org/drawingml/2006/main">
               <a:ext uri="{FF2B5EF4-FFF2-40B4-BE49-F238E27FC236}">
-                <a16:creationId xmlns:a16="http://schemas.microsoft.com/office/drawing/2014/main" id="{41129F4E-5DBF-4ADB-9D30-7FAF47E89514}"/>
+                <a16:creationId xmlns:a16="http://schemas.microsoft.com/office/drawing/2014/main" id="{A96E51D8-79AE-47B3-A29F-A09141C4F57B}"/>
               </a:ext>
             </a:extLst>
           </p:cNvPr>
@@ -5673,7 +5673,7 @@
           <p:cNvPr id="3" name="">
             <a:extLst xmlns:a="http://schemas.openxmlformats.org/drawingml/2006/main">
               <a:ext uri="{FF2B5EF4-FFF2-40B4-BE49-F238E27FC236}">
-                <a16:creationId xmlns:a16="http://schemas.microsoft.com/office/drawing/2014/main" id="{1D66553D-5AC5-4288-ACE5-D648FF79BC09}"/>
+                <a16:creationId xmlns:a16="http://schemas.microsoft.com/office/drawing/2014/main" id="{ACA96F28-687A-4A2E-A215-1638CFF058C0}"/>
               </a:ext>
             </a:extLst>
           </p:cNvPr>
@@ -5705,7 +5705,7 @@
           <p:cNvPr id="4" name="">
             <a:extLst xmlns:a="http://schemas.openxmlformats.org/drawingml/2006/main">
               <a:ext uri="{FF2B5EF4-FFF2-40B4-BE49-F238E27FC236}">
-                <a16:creationId xmlns:a16="http://schemas.microsoft.com/office/drawing/2014/main" id="{F2976714-CF23-4405-92F1-6620BD5FA782}"/>
+                <a16:creationId xmlns:a16="http://schemas.microsoft.com/office/drawing/2014/main" id="{455A00C2-1B14-4EDB-9116-51BC36C12174}"/>
               </a:ext>
             </a:extLst>
           </p:cNvPr>
@@ -5762,7 +5762,7 @@
           <p:cNvPr id="5" name="">
             <a:extLst xmlns:a="http://schemas.openxmlformats.org/drawingml/2006/main">
               <a:ext uri="{FF2B5EF4-FFF2-40B4-BE49-F238E27FC236}">
-                <a16:creationId xmlns:a16="http://schemas.microsoft.com/office/drawing/2014/main" id="{467FC34A-5759-4F3D-BB0A-858F921FD2F0}"/>
+                <a16:creationId xmlns:a16="http://schemas.microsoft.com/office/drawing/2014/main" id="{08C7168D-E18C-4679-9EEC-448584207567}"/>
               </a:ext>
             </a:extLst>
           </p:cNvPr>
@@ -5819,7 +5819,7 @@
           <p:cNvPr id="6" name="">
             <a:extLst xmlns:a="http://schemas.openxmlformats.org/drawingml/2006/main">
               <a:ext uri="{FF2B5EF4-FFF2-40B4-BE49-F238E27FC236}">
-                <a16:creationId xmlns:a16="http://schemas.microsoft.com/office/drawing/2014/main" id="{93B11F07-12CD-4470-8693-88B39DAAED4F}"/>
+                <a16:creationId xmlns:a16="http://schemas.microsoft.com/office/drawing/2014/main" id="{568DC536-84C7-457D-A2B0-6997E6162BDA}"/>
               </a:ext>
             </a:extLst>
           </p:cNvPr>
@@ -5876,7 +5876,7 @@
           <p:cNvPr id="7" name="">
             <a:extLst xmlns:a="http://schemas.openxmlformats.org/drawingml/2006/main">
               <a:ext uri="{FF2B5EF4-FFF2-40B4-BE49-F238E27FC236}">
-                <a16:creationId xmlns:a16="http://schemas.microsoft.com/office/drawing/2014/main" id="{564F3952-A63B-4830-A520-15B4A985E5CF}"/>
+                <a16:creationId xmlns:a16="http://schemas.microsoft.com/office/drawing/2014/main" id="{40E2AB35-7E90-4D32-AB83-0AFADF8E45DC}"/>
               </a:ext>
             </a:extLst>
           </p:cNvPr>
@@ -5908,7 +5908,7 @@
           <p:cNvPr id="8" name="">
             <a:extLst xmlns:a="http://schemas.openxmlformats.org/drawingml/2006/main">
               <a:ext uri="{FF2B5EF4-FFF2-40B4-BE49-F238E27FC236}">
-                <a16:creationId xmlns:a16="http://schemas.microsoft.com/office/drawing/2014/main" id="{01BC1DEB-A0B1-4E0D-8C0B-F94A4C7A2A0C}"/>
+                <a16:creationId xmlns:a16="http://schemas.microsoft.com/office/drawing/2014/main" id="{F38C509B-5F0F-4436-A70E-B570DD5FC09F}"/>
               </a:ext>
             </a:extLst>
           </p:cNvPr>
@@ -5965,7 +5965,7 @@
           <p:cNvPr id="9" name="">
             <a:extLst xmlns:a="http://schemas.openxmlformats.org/drawingml/2006/main">
               <a:ext uri="{FF2B5EF4-FFF2-40B4-BE49-F238E27FC236}">
-                <a16:creationId xmlns:a16="http://schemas.microsoft.com/office/drawing/2014/main" id="{39AB65CB-DBA3-47A9-9A99-BD7178174397}"/>
+                <a16:creationId xmlns:a16="http://schemas.microsoft.com/office/drawing/2014/main" id="{A8C308FF-5486-4ACF-8F14-E8108819B3C6}"/>
               </a:ext>
             </a:extLst>
           </p:cNvPr>
@@ -6022,7 +6022,7 @@
           <p:cNvPr id="10" name="">
             <a:extLst xmlns:a="http://schemas.openxmlformats.org/drawingml/2006/main">
               <a:ext uri="{FF2B5EF4-FFF2-40B4-BE49-F238E27FC236}">
-                <a16:creationId xmlns:a16="http://schemas.microsoft.com/office/drawing/2014/main" id="{D01810D4-3B0D-46BC-9E82-8A17ED87E46D}"/>
+                <a16:creationId xmlns:a16="http://schemas.microsoft.com/office/drawing/2014/main" id="{6090AEA8-F8CC-4E44-BB2C-1EC7B1CF7CD4}"/>
               </a:ext>
             </a:extLst>
           </p:cNvPr>
@@ -6056,7 +6056,7 @@
           <p:cNvPr id="11" name="">
             <a:extLst xmlns:a="http://schemas.openxmlformats.org/drawingml/2006/main">
               <a:ext uri="{FF2B5EF4-FFF2-40B4-BE49-F238E27FC236}">
-                <a16:creationId xmlns:a16="http://schemas.microsoft.com/office/drawing/2014/main" id="{F8A9AD18-F6F2-4512-B5E5-FA96A51E9347}"/>
+                <a16:creationId xmlns:a16="http://schemas.microsoft.com/office/drawing/2014/main" id="{EAC3ED08-2AFF-4B5C-BCAD-1577F0178B5C}"/>
               </a:ext>
             </a:extLst>
           </p:cNvPr>
@@ -6088,7 +6088,7 @@
           <p:cNvPr id="12" name="">
             <a:extLst xmlns:a="http://schemas.openxmlformats.org/drawingml/2006/main">
               <a:ext uri="{FF2B5EF4-FFF2-40B4-BE49-F238E27FC236}">
-                <a16:creationId xmlns:a16="http://schemas.microsoft.com/office/drawing/2014/main" id="{54A42342-C68B-4568-A542-CAB076A44388}"/>
+                <a16:creationId xmlns:a16="http://schemas.microsoft.com/office/drawing/2014/main" id="{0951D1B5-7A4E-4CA7-9DAC-7630B3D56761}"/>
               </a:ext>
             </a:extLst>
           </p:cNvPr>
@@ -6145,7 +6145,7 @@
           <p:cNvPr id="13" name="">
             <a:extLst xmlns:a="http://schemas.openxmlformats.org/drawingml/2006/main">
               <a:ext uri="{FF2B5EF4-FFF2-40B4-BE49-F238E27FC236}">
-                <a16:creationId xmlns:a16="http://schemas.microsoft.com/office/drawing/2014/main" id="{A5FAFF06-E806-4D8C-BA37-A3ED7ECED251}"/>
+                <a16:creationId xmlns:a16="http://schemas.microsoft.com/office/drawing/2014/main" id="{8C29B7D4-FCFD-4168-AE90-676885A15AB2}"/>
               </a:ext>
             </a:extLst>
           </p:cNvPr>
@@ -6202,7 +6202,7 @@
           <p:cNvPr id="14" name="">
             <a:extLst xmlns:a="http://schemas.openxmlformats.org/drawingml/2006/main">
               <a:ext uri="{FF2B5EF4-FFF2-40B4-BE49-F238E27FC236}">
-                <a16:creationId xmlns:a16="http://schemas.microsoft.com/office/drawing/2014/main" id="{3FFDFA50-3EC9-47D3-9F25-385753DC3686}"/>
+                <a16:creationId xmlns:a16="http://schemas.microsoft.com/office/drawing/2014/main" id="{DD41DBF1-8827-4E19-85A8-3F83816D70B2}"/>
               </a:ext>
             </a:extLst>
           </p:cNvPr>
@@ -6236,7 +6236,7 @@
           <p:cNvPr id="15" name="">
             <a:extLst xmlns:a="http://schemas.openxmlformats.org/drawingml/2006/main">
               <a:ext uri="{FF2B5EF4-FFF2-40B4-BE49-F238E27FC236}">
-                <a16:creationId xmlns:a16="http://schemas.microsoft.com/office/drawing/2014/main" id="{0B5F5F78-8B58-4EF5-9732-9C111CBE772E}"/>
+                <a16:creationId xmlns:a16="http://schemas.microsoft.com/office/drawing/2014/main" id="{9BC5ED15-D1A0-483C-A4B9-7E03DD0E0952}"/>
               </a:ext>
             </a:extLst>
           </p:cNvPr>
@@ -6268,7 +6268,7 @@
           <p:cNvPr id="16" name="">
             <a:extLst xmlns:a="http://schemas.openxmlformats.org/drawingml/2006/main">
               <a:ext uri="{FF2B5EF4-FFF2-40B4-BE49-F238E27FC236}">
-                <a16:creationId xmlns:a16="http://schemas.microsoft.com/office/drawing/2014/main" id="{62590460-4CB1-4E02-B2EE-90E331F71614}"/>
+                <a16:creationId xmlns:a16="http://schemas.microsoft.com/office/drawing/2014/main" id="{80F08974-601C-44D4-8A6D-20EC6D3EBCDD}"/>
               </a:ext>
             </a:extLst>
           </p:cNvPr>
@@ -6325,7 +6325,7 @@
           <p:cNvPr id="17" name="">
             <a:extLst xmlns:a="http://schemas.openxmlformats.org/drawingml/2006/main">
               <a:ext uri="{FF2B5EF4-FFF2-40B4-BE49-F238E27FC236}">
-                <a16:creationId xmlns:a16="http://schemas.microsoft.com/office/drawing/2014/main" id="{B6E50AE1-3CBA-4042-911F-E6FA2152C3FD}"/>
+                <a16:creationId xmlns:a16="http://schemas.microsoft.com/office/drawing/2014/main" id="{0F4E998D-5C4C-44FC-8F40-8E57976C2580}"/>
               </a:ext>
             </a:extLst>
           </p:cNvPr>
@@ -6382,7 +6382,7 @@
           <p:cNvPr id="18" name="">
             <a:extLst xmlns:a="http://schemas.openxmlformats.org/drawingml/2006/main">
               <a:ext uri="{FF2B5EF4-FFF2-40B4-BE49-F238E27FC236}">
-                <a16:creationId xmlns:a16="http://schemas.microsoft.com/office/drawing/2014/main" id="{054E7982-8B88-4BDE-B217-1FC2C5C0F942}"/>
+                <a16:creationId xmlns:a16="http://schemas.microsoft.com/office/drawing/2014/main" id="{4A177301-F2C7-4485-8EA5-A35FC1904493}"/>
               </a:ext>
             </a:extLst>
           </p:cNvPr>
@@ -6416,7 +6416,7 @@
           <p:cNvPr id="19" name="">
             <a:extLst xmlns:a="http://schemas.openxmlformats.org/drawingml/2006/main">
               <a:ext uri="{FF2B5EF4-FFF2-40B4-BE49-F238E27FC236}">
-                <a16:creationId xmlns:a16="http://schemas.microsoft.com/office/drawing/2014/main" id="{43B64782-A310-41CE-AB75-B40E4CB9561A}"/>
+                <a16:creationId xmlns:a16="http://schemas.microsoft.com/office/drawing/2014/main" id="{7363B13C-CDA8-4505-BC58-0D64E75BDDBC}"/>
               </a:ext>
             </a:extLst>
           </p:cNvPr>
@@ -6448,7 +6448,7 @@
           <p:cNvPr id="20" name="">
             <a:extLst xmlns:a="http://schemas.openxmlformats.org/drawingml/2006/main">
               <a:ext uri="{FF2B5EF4-FFF2-40B4-BE49-F238E27FC236}">
-                <a16:creationId xmlns:a16="http://schemas.microsoft.com/office/drawing/2014/main" id="{07D23563-3566-4092-8B9E-23257100B9C7}"/>
+                <a16:creationId xmlns:a16="http://schemas.microsoft.com/office/drawing/2014/main" id="{D225861D-C885-4339-876C-CE1B2EF3DA84}"/>
               </a:ext>
             </a:extLst>
           </p:cNvPr>
@@ -6505,7 +6505,7 @@
           <p:cNvPr id="21" name="">
             <a:extLst xmlns:a="http://schemas.openxmlformats.org/drawingml/2006/main">
               <a:ext uri="{FF2B5EF4-FFF2-40B4-BE49-F238E27FC236}">
-                <a16:creationId xmlns:a16="http://schemas.microsoft.com/office/drawing/2014/main" id="{AD88E4F4-A197-4E1A-A0BE-561253C836F3}"/>
+                <a16:creationId xmlns:a16="http://schemas.microsoft.com/office/drawing/2014/main" id="{0ED31590-7ED9-48BE-87DB-8C40299FA5F0}"/>
               </a:ext>
             </a:extLst>
           </p:cNvPr>
@@ -6562,7 +6562,7 @@
           <p:cNvPr id="22" name="">
             <a:extLst xmlns:a="http://schemas.openxmlformats.org/drawingml/2006/main">
               <a:ext uri="{FF2B5EF4-FFF2-40B4-BE49-F238E27FC236}">
-                <a16:creationId xmlns:a16="http://schemas.microsoft.com/office/drawing/2014/main" id="{92A6577B-64DE-463C-8E9C-54EBCC9C7369}"/>
+                <a16:creationId xmlns:a16="http://schemas.microsoft.com/office/drawing/2014/main" id="{34701D2F-0174-40DC-BFBC-12CC28BB5751}"/>
               </a:ext>
             </a:extLst>
           </p:cNvPr>
@@ -6617,7 +6617,7 @@
     </p:spTree>
     <p:extLst>
       <p:ext uri="{BB962C8B-B14F-4D97-AF65-F5344CB8AC3E}">
-        <p14:creationId xmlns:p14="http://schemas.microsoft.com/office/powerpoint/2010/main" val="1643699055"/>
+        <p14:creationId xmlns:p14="http://schemas.microsoft.com/office/powerpoint/2010/main" val="452965852"/>
       </p:ext>
     </p:extLst>
   </p:cSld>
@@ -6818,7 +6818,7 @@
           <p:cNvPr id="16" name="">
             <a:extLst xmlns:a="http://schemas.openxmlformats.org/drawingml/2006/main">
               <a:ext uri="{FF2B5EF4-FFF2-40B4-BE49-F238E27FC236}">
-                <a16:creationId xmlns:a16="http://schemas.microsoft.com/office/drawing/2014/main" id="{7EEBBB7A-1AE7-444B-BCC3-522BDEDB20D4}"/>
+                <a16:creationId xmlns:a16="http://schemas.microsoft.com/office/drawing/2014/main" id="{F802BA4D-6EDD-4093-946C-C53F6788AD69}"/>
               </a:ext>
             </a:extLst>
           </p:cNvPr>
@@ -6850,7 +6850,7 @@
           <p:cNvPr id="2" name="">
             <a:extLst xmlns:a="http://schemas.openxmlformats.org/drawingml/2006/main">
               <a:ext uri="{FF2B5EF4-FFF2-40B4-BE49-F238E27FC236}">
-                <a16:creationId xmlns:a16="http://schemas.microsoft.com/office/drawing/2014/main" id="{F4010AC8-B7E8-4132-BC78-17DFB06AA1D8}"/>
+                <a16:creationId xmlns:a16="http://schemas.microsoft.com/office/drawing/2014/main" id="{E9640F4A-13A7-4C96-B5DC-AE03D21F911B}"/>
               </a:ext>
             </a:extLst>
           </p:cNvPr>
@@ -6907,7 +6907,7 @@
           <p:cNvPr id="3" name="">
             <a:extLst xmlns:a="http://schemas.openxmlformats.org/drawingml/2006/main">
               <a:ext uri="{FF2B5EF4-FFF2-40B4-BE49-F238E27FC236}">
-                <a16:creationId xmlns:a16="http://schemas.microsoft.com/office/drawing/2014/main" id="{519CB462-3F22-4E10-BD59-15DA03B662B8}"/>
+                <a16:creationId xmlns:a16="http://schemas.microsoft.com/office/drawing/2014/main" id="{BE1E00DB-4AC4-48FA-AD9B-2B04C67B9FA1}"/>
               </a:ext>
             </a:extLst>
           </p:cNvPr>
@@ -6939,7 +6939,7 @@
           <p:cNvPr id="4" name="">
             <a:extLst xmlns:a="http://schemas.openxmlformats.org/drawingml/2006/main">
               <a:ext uri="{FF2B5EF4-FFF2-40B4-BE49-F238E27FC236}">
-                <a16:creationId xmlns:a16="http://schemas.microsoft.com/office/drawing/2014/main" id="{B4F3D207-3282-441A-A4F4-F286775BC153}"/>
+                <a16:creationId xmlns:a16="http://schemas.microsoft.com/office/drawing/2014/main" id="{6C372C05-55B9-4B94-BCF3-C0951A988077}"/>
               </a:ext>
             </a:extLst>
           </p:cNvPr>
@@ -6996,7 +6996,7 @@
           <p:cNvPr id="5" name="">
             <a:extLst xmlns:a="http://schemas.openxmlformats.org/drawingml/2006/main">
               <a:ext uri="{FF2B5EF4-FFF2-40B4-BE49-F238E27FC236}">
-                <a16:creationId xmlns:a16="http://schemas.microsoft.com/office/drawing/2014/main" id="{BFEA1E9F-C10C-49E5-A018-2EFDB188C8F1}"/>
+                <a16:creationId xmlns:a16="http://schemas.microsoft.com/office/drawing/2014/main" id="{1E722090-774B-47DC-9CB3-DC6783E3B680}"/>
               </a:ext>
             </a:extLst>
           </p:cNvPr>
@@ -7053,7 +7053,7 @@
           <p:cNvPr id="6" name="">
             <a:extLst xmlns:a="http://schemas.openxmlformats.org/drawingml/2006/main">
               <a:ext uri="{FF2B5EF4-FFF2-40B4-BE49-F238E27FC236}">
-                <a16:creationId xmlns:a16="http://schemas.microsoft.com/office/drawing/2014/main" id="{4F17D347-FAAB-428E-AA6D-0AF60DB3AF28}"/>
+                <a16:creationId xmlns:a16="http://schemas.microsoft.com/office/drawing/2014/main" id="{18E99678-DAC0-4393-ACB0-0964617F1E89}"/>
               </a:ext>
             </a:extLst>
           </p:cNvPr>
@@ -7110,7 +7110,7 @@
           <p:cNvPr id="7" name="">
             <a:extLst xmlns:a="http://schemas.openxmlformats.org/drawingml/2006/main">
               <a:ext uri="{FF2B5EF4-FFF2-40B4-BE49-F238E27FC236}">
-                <a16:creationId xmlns:a16="http://schemas.microsoft.com/office/drawing/2014/main" id="{D7E2BDAF-C02E-4364-AE1E-9BD740013AD4}"/>
+                <a16:creationId xmlns:a16="http://schemas.microsoft.com/office/drawing/2014/main" id="{A86A778B-A901-48A5-89AC-46B628EC057C}"/>
               </a:ext>
             </a:extLst>
           </p:cNvPr>
@@ -7142,7 +7142,7 @@
           <p:cNvPr id="8" name="">
             <a:extLst xmlns:a="http://schemas.openxmlformats.org/drawingml/2006/main">
               <a:ext uri="{FF2B5EF4-FFF2-40B4-BE49-F238E27FC236}">
-                <a16:creationId xmlns:a16="http://schemas.microsoft.com/office/drawing/2014/main" id="{538C2AD1-E196-4397-82C9-E6410F6CA3BE}"/>
+                <a16:creationId xmlns:a16="http://schemas.microsoft.com/office/drawing/2014/main" id="{CD123816-9D10-4983-9962-0EFE1B348E90}"/>
               </a:ext>
             </a:extLst>
           </p:cNvPr>
@@ -7199,7 +7199,7 @@
           <p:cNvPr id="9" name="">
             <a:extLst xmlns:a="http://schemas.openxmlformats.org/drawingml/2006/main">
               <a:ext uri="{FF2B5EF4-FFF2-40B4-BE49-F238E27FC236}">
-                <a16:creationId xmlns:a16="http://schemas.microsoft.com/office/drawing/2014/main" id="{9395AF5A-338F-4003-A9E7-56BF5A301912}"/>
+                <a16:creationId xmlns:a16="http://schemas.microsoft.com/office/drawing/2014/main" id="{C795FC2B-EE7B-4198-9C91-5FD848698FC4}"/>
               </a:ext>
             </a:extLst>
           </p:cNvPr>
@@ -7256,7 +7256,7 @@
           <p:cNvPr id="10" name="">
             <a:extLst xmlns:a="http://schemas.openxmlformats.org/drawingml/2006/main">
               <a:ext uri="{FF2B5EF4-FFF2-40B4-BE49-F238E27FC236}">
-                <a16:creationId xmlns:a16="http://schemas.microsoft.com/office/drawing/2014/main" id="{C2618D72-7F0E-42BE-BCF0-46648946E007}"/>
+                <a16:creationId xmlns:a16="http://schemas.microsoft.com/office/drawing/2014/main" id="{1EC2E884-6D01-42CB-A584-A3B97483EB50}"/>
               </a:ext>
             </a:extLst>
           </p:cNvPr>
@@ -7313,7 +7313,7 @@
           <p:cNvPr id="11" name="">
             <a:extLst xmlns:a="http://schemas.openxmlformats.org/drawingml/2006/main">
               <a:ext uri="{FF2B5EF4-FFF2-40B4-BE49-F238E27FC236}">
-                <a16:creationId xmlns:a16="http://schemas.microsoft.com/office/drawing/2014/main" id="{D3E78A7D-E8A0-4561-B86E-6DACA3534B28}"/>
+                <a16:creationId xmlns:a16="http://schemas.microsoft.com/office/drawing/2014/main" id="{3890E816-6A52-4FED-A117-CC134D3782CF}"/>
               </a:ext>
             </a:extLst>
           </p:cNvPr>
@@ -7345,7 +7345,7 @@
           <p:cNvPr id="12" name="">
             <a:extLst xmlns:a="http://schemas.openxmlformats.org/drawingml/2006/main">
               <a:ext uri="{FF2B5EF4-FFF2-40B4-BE49-F238E27FC236}">
-                <a16:creationId xmlns:a16="http://schemas.microsoft.com/office/drawing/2014/main" id="{F4E24CD2-3E1B-4912-953C-5CDF6C3CB5EF}"/>
+                <a16:creationId xmlns:a16="http://schemas.microsoft.com/office/drawing/2014/main" id="{E19C280C-00CF-4309-8E79-2669FAA5C8D9}"/>
               </a:ext>
             </a:extLst>
           </p:cNvPr>
@@ -7402,7 +7402,7 @@
           <p:cNvPr id="13" name="">
             <a:extLst xmlns:a="http://schemas.openxmlformats.org/drawingml/2006/main">
               <a:ext uri="{FF2B5EF4-FFF2-40B4-BE49-F238E27FC236}">
-                <a16:creationId xmlns:a16="http://schemas.microsoft.com/office/drawing/2014/main" id="{74CCCA07-10FD-4EB7-B130-4B7894C3304C}"/>
+                <a16:creationId xmlns:a16="http://schemas.microsoft.com/office/drawing/2014/main" id="{B323F10E-8C3C-4F2F-9469-B8AC1EC7FF7B}"/>
               </a:ext>
             </a:extLst>
           </p:cNvPr>
@@ -7459,7 +7459,7 @@
           <p:cNvPr id="14" name="">
             <a:extLst xmlns:a="http://schemas.openxmlformats.org/drawingml/2006/main">
               <a:ext uri="{FF2B5EF4-FFF2-40B4-BE49-F238E27FC236}">
-                <a16:creationId xmlns:a16="http://schemas.microsoft.com/office/drawing/2014/main" id="{D50BF897-6094-49A7-8254-F8FD7AB5821C}"/>
+                <a16:creationId xmlns:a16="http://schemas.microsoft.com/office/drawing/2014/main" id="{DB5A7EC1-A816-4856-AC77-C484D7C1CC2D}"/>
               </a:ext>
             </a:extLst>
           </p:cNvPr>
@@ -7516,7 +7516,7 @@
           <p:cNvPr id="15" name="">
             <a:extLst xmlns:a="http://schemas.openxmlformats.org/drawingml/2006/main">
               <a:ext uri="{FF2B5EF4-FFF2-40B4-BE49-F238E27FC236}">
-                <a16:creationId xmlns:a16="http://schemas.microsoft.com/office/drawing/2014/main" id="{025EF9CF-8391-442C-ADE4-4D886BD8C838}"/>
+                <a16:creationId xmlns:a16="http://schemas.microsoft.com/office/drawing/2014/main" id="{4A1CB733-CE00-426A-AFC3-2D039E5AF9A4}"/>
               </a:ext>
             </a:extLst>
           </p:cNvPr>
@@ -7571,7 +7571,7 @@
     </p:spTree>
     <p:extLst>
       <p:ext uri="{BB962C8B-B14F-4D97-AF65-F5344CB8AC3E}">
-        <p14:creationId xmlns:p14="http://schemas.microsoft.com/office/powerpoint/2010/main" val="536681406"/>
+        <p14:creationId xmlns:p14="http://schemas.microsoft.com/office/powerpoint/2010/main" val="1228570737"/>
       </p:ext>
     </p:extLst>
   </p:cSld>
@@ -7772,7 +7772,7 @@
           <p:cNvPr id="23" name="">
             <a:extLst xmlns:a="http://schemas.openxmlformats.org/drawingml/2006/main">
               <a:ext uri="{FF2B5EF4-FFF2-40B4-BE49-F238E27FC236}">
-                <a16:creationId xmlns:a16="http://schemas.microsoft.com/office/drawing/2014/main" id="{525A0779-3AB7-40F2-B346-7418BB5634D4}"/>
+                <a16:creationId xmlns:a16="http://schemas.microsoft.com/office/drawing/2014/main" id="{95C58B13-50CE-41CC-864B-FC95134C8320}"/>
               </a:ext>
             </a:extLst>
           </p:cNvPr>
@@ -7804,7 +7804,7 @@
           <p:cNvPr id="2" name="">
             <a:extLst xmlns:a="http://schemas.openxmlformats.org/drawingml/2006/main">
               <a:ext uri="{FF2B5EF4-FFF2-40B4-BE49-F238E27FC236}">
-                <a16:creationId xmlns:a16="http://schemas.microsoft.com/office/drawing/2014/main" id="{C7444C62-86E1-40C4-8C4A-B1B3D9300A87}"/>
+                <a16:creationId xmlns:a16="http://schemas.microsoft.com/office/drawing/2014/main" id="{AC68BBD2-8CD7-417C-813D-EF64CFAD98E6}"/>
               </a:ext>
             </a:extLst>
           </p:cNvPr>
@@ -7861,7 +7861,7 @@
           <p:cNvPr id="3" name="">
             <a:extLst xmlns:a="http://schemas.openxmlformats.org/drawingml/2006/main">
               <a:ext uri="{FF2B5EF4-FFF2-40B4-BE49-F238E27FC236}">
-                <a16:creationId xmlns:a16="http://schemas.microsoft.com/office/drawing/2014/main" id="{5BC6D356-B280-415E-B09C-F3BAC35B99D9}"/>
+                <a16:creationId xmlns:a16="http://schemas.microsoft.com/office/drawing/2014/main" id="{CB180BF2-5EDC-4933-9165-AC21D189AFCE}"/>
               </a:ext>
             </a:extLst>
           </p:cNvPr>
@@ -7893,7 +7893,7 @@
           <p:cNvPr id="4" name="">
             <a:extLst xmlns:a="http://schemas.openxmlformats.org/drawingml/2006/main">
               <a:ext uri="{FF2B5EF4-FFF2-40B4-BE49-F238E27FC236}">
-                <a16:creationId xmlns:a16="http://schemas.microsoft.com/office/drawing/2014/main" id="{1A4425FC-0B53-49A9-BBCC-EDFA0E8E3919}"/>
+                <a16:creationId xmlns:a16="http://schemas.microsoft.com/office/drawing/2014/main" id="{B8B663C0-FC3A-445B-8764-E1488329ECDC}"/>
               </a:ext>
             </a:extLst>
           </p:cNvPr>
@@ -7950,7 +7950,7 @@
           <p:cNvPr id="5" name="">
             <a:extLst xmlns:a="http://schemas.openxmlformats.org/drawingml/2006/main">
               <a:ext uri="{FF2B5EF4-FFF2-40B4-BE49-F238E27FC236}">
-                <a16:creationId xmlns:a16="http://schemas.microsoft.com/office/drawing/2014/main" id="{4B8521E6-609B-4F4C-9A3C-EAF5CB9C7F50}"/>
+                <a16:creationId xmlns:a16="http://schemas.microsoft.com/office/drawing/2014/main" id="{C6170F8E-8B2A-437B-BBD8-B5B08C2552B7}"/>
               </a:ext>
             </a:extLst>
           </p:cNvPr>
@@ -8007,7 +8007,7 @@
           <p:cNvPr id="6" name="">
             <a:extLst xmlns:a="http://schemas.openxmlformats.org/drawingml/2006/main">
               <a:ext uri="{FF2B5EF4-FFF2-40B4-BE49-F238E27FC236}">
-                <a16:creationId xmlns:a16="http://schemas.microsoft.com/office/drawing/2014/main" id="{B130AC70-75F0-4700-92E3-03882E3B02AD}"/>
+                <a16:creationId xmlns:a16="http://schemas.microsoft.com/office/drawing/2014/main" id="{B0F9BB7D-FAD5-4172-8B47-59C6C74DFCD6}"/>
               </a:ext>
             </a:extLst>
           </p:cNvPr>
@@ -8064,7 +8064,7 @@
           <p:cNvPr id="7" name="">
             <a:extLst xmlns:a="http://schemas.openxmlformats.org/drawingml/2006/main">
               <a:ext uri="{FF2B5EF4-FFF2-40B4-BE49-F238E27FC236}">
-                <a16:creationId xmlns:a16="http://schemas.microsoft.com/office/drawing/2014/main" id="{EDB5F19C-0204-4821-8CD4-40DD75D82B57}"/>
+                <a16:creationId xmlns:a16="http://schemas.microsoft.com/office/drawing/2014/main" id="{28917442-4AB3-4C83-8FD6-FD59F64C3DEB}"/>
               </a:ext>
             </a:extLst>
           </p:cNvPr>
@@ -8096,7 +8096,7 @@
           <p:cNvPr id="8" name="">
             <a:extLst xmlns:a="http://schemas.openxmlformats.org/drawingml/2006/main">
               <a:ext uri="{FF2B5EF4-FFF2-40B4-BE49-F238E27FC236}">
-                <a16:creationId xmlns:a16="http://schemas.microsoft.com/office/drawing/2014/main" id="{A27C2EF4-3B09-4144-A748-1B664B9294AD}"/>
+                <a16:creationId xmlns:a16="http://schemas.microsoft.com/office/drawing/2014/main" id="{B401BB8E-213F-453D-B81A-75E6CAA15725}"/>
               </a:ext>
             </a:extLst>
           </p:cNvPr>
@@ -8153,7 +8153,7 @@
           <p:cNvPr id="9" name="">
             <a:extLst xmlns:a="http://schemas.openxmlformats.org/drawingml/2006/main">
               <a:ext uri="{FF2B5EF4-FFF2-40B4-BE49-F238E27FC236}">
-                <a16:creationId xmlns:a16="http://schemas.microsoft.com/office/drawing/2014/main" id="{E4EF1B71-E1E2-435C-89A9-03FCDBF2E981}"/>
+                <a16:creationId xmlns:a16="http://schemas.microsoft.com/office/drawing/2014/main" id="{6F25534E-73A7-42F5-B1F0-BE7124E86D05}"/>
               </a:ext>
             </a:extLst>
           </p:cNvPr>
@@ -8210,19 +8210,19 @@
           <p:cNvPr id="10" name="">
             <a:extLst xmlns:a="http://schemas.openxmlformats.org/drawingml/2006/main">
               <a:ext uri="{FF2B5EF4-FFF2-40B4-BE49-F238E27FC236}">
-                <a16:creationId xmlns:a16="http://schemas.microsoft.com/office/drawing/2014/main" id="{B90179D0-5BC0-493D-BFC2-31BCE08BF320}"/>
-              </a:ext>
-            </a:extLst>
-          </p:cNvPr>
-          <p:cNvSpPr>
-            <a:spLocks xmlns:a="http://schemas.openxmlformats.org/drawingml/2006/main" noGrp="1"/>
-          </p:cNvSpPr>
-          <p:nvPr/>
-        </p:nvSpPr>
-        <p:spPr>
-          <a:xfrm xmlns:a="http://schemas.openxmlformats.org/drawingml/2006/main">
-            <a:off x="914400" y="1257300"/>
-            <a:ext cx="10363200" cy="781050"/>
+                <a16:creationId xmlns:a16="http://schemas.microsoft.com/office/drawing/2014/main" id="{C5B1450E-C97B-4D7D-B0FC-CB65F6A7B6EB}"/>
+              </a:ext>
+            </a:extLst>
+          </p:cNvPr>
+          <p:cNvSpPr>
+            <a:spLocks xmlns:a="http://schemas.openxmlformats.org/drawingml/2006/main" noGrp="1"/>
+          </p:cNvSpPr>
+          <p:nvPr/>
+        </p:nvSpPr>
+        <p:spPr>
+          <a:xfrm xmlns:a="http://schemas.openxmlformats.org/drawingml/2006/main">
+            <a:off x="857250" y="1219200"/>
+            <a:ext cx="10477500" cy="742950"/>
           </a:xfrm>
           <a:prstGeom xmlns:a="http://schemas.openxmlformats.org/drawingml/2006/main" prst="rect">
             <a:avLst/>
@@ -8239,7 +8239,7 @@
           <a:lstStyle xmlns:a="http://schemas.openxmlformats.org/drawingml/2006/main"/>
           <a:p xmlns:a="http://schemas.openxmlformats.org/drawingml/2006/main">
             <a:pPr algn="ctr">
-              <a:defRPr sz="2175" b="1">
+              <a:defRPr sz="2100" b="1">
                 <a:solidFill>
                   <a:srgbClr val="17253A"/>
                 </a:solidFill>
@@ -8249,7 +8249,7 @@
               </a:defRPr>
             </a:pPr>
             <a:r>
-              <a:rPr sz="2175" b="1">
+              <a:rPr sz="2100" b="1">
                 <a:solidFill>
                   <a:srgbClr val="17253A"/>
                 </a:solidFill>
@@ -8267,28 +8267,30 @@
           <p:cNvPr id="11" name="">
             <a:extLst xmlns:a="http://schemas.openxmlformats.org/drawingml/2006/main">
               <a:ext uri="{FF2B5EF4-FFF2-40B4-BE49-F238E27FC236}">
-                <a16:creationId xmlns:a16="http://schemas.microsoft.com/office/drawing/2014/main" id="{D9DFF580-EE90-4176-A10F-93B6183F7051}"/>
-              </a:ext>
-            </a:extLst>
-          </p:cNvPr>
-          <p:cNvSpPr>
-            <a:spLocks xmlns:a="http://schemas.openxmlformats.org/drawingml/2006/main" noGrp="1"/>
-          </p:cNvSpPr>
-          <p:nvPr/>
-        </p:nvSpPr>
-        <p:spPr>
-          <a:xfrm xmlns:a="http://schemas.openxmlformats.org/drawingml/2006/main">
-            <a:off x="1000125" y="2247900"/>
-            <a:ext cx="476250" cy="476250"/>
-          </a:xfrm>
-          <a:prstGeom xmlns:a="http://schemas.openxmlformats.org/drawingml/2006/main" prst="ellipse">
+                <a16:creationId xmlns:a16="http://schemas.microsoft.com/office/drawing/2014/main" id="{5A114473-B589-4805-97D7-47E2304A0239}"/>
+              </a:ext>
+            </a:extLst>
+          </p:cNvPr>
+          <p:cNvSpPr>
+            <a:spLocks xmlns:a="http://schemas.openxmlformats.org/drawingml/2006/main" noGrp="1"/>
+          </p:cNvSpPr>
+          <p:nvPr/>
+        </p:nvSpPr>
+        <p:spPr>
+          <a:xfrm xmlns:a="http://schemas.openxmlformats.org/drawingml/2006/main">
+            <a:off x="971550" y="2124075"/>
+            <a:ext cx="38100" cy="3524250"/>
+          </a:xfrm>
+          <a:prstGeom xmlns:a="http://schemas.openxmlformats.org/drawingml/2006/main" prst="rect">
             <a:avLst/>
           </a:prstGeom>
           <a:solidFill xmlns:a="http://schemas.openxmlformats.org/drawingml/2006/main">
-            <a:srgbClr val="18324A"/>
+            <a:srgbClr val="2C6E73"/>
           </a:solidFill>
           <a:ln xmlns:a="http://schemas.openxmlformats.org/drawingml/2006/main" w="0">
-            <a:noFill/>
+            <a:solidFill>
+              <a:srgbClr val="2C6E73"/>
+            </a:solidFill>
           </a:ln>
         </p:spPr>
       </p:sp>
@@ -8297,19 +8299,19 @@
           <p:cNvPr id="12" name="">
             <a:extLst xmlns:a="http://schemas.openxmlformats.org/drawingml/2006/main">
               <a:ext uri="{FF2B5EF4-FFF2-40B4-BE49-F238E27FC236}">
-                <a16:creationId xmlns:a16="http://schemas.microsoft.com/office/drawing/2014/main" id="{A0B8CFD5-CE59-4A55-99A2-4FBE21C67BA0}"/>
-              </a:ext>
-            </a:extLst>
-          </p:cNvPr>
-          <p:cNvSpPr>
-            <a:spLocks xmlns:a="http://schemas.openxmlformats.org/drawingml/2006/main" noGrp="1"/>
-          </p:cNvSpPr>
-          <p:nvPr/>
-        </p:nvSpPr>
-        <p:spPr>
-          <a:xfrm xmlns:a="http://schemas.openxmlformats.org/drawingml/2006/main">
-            <a:off x="1000125" y="2276475"/>
-            <a:ext cx="476250" cy="419100"/>
+                <a16:creationId xmlns:a16="http://schemas.microsoft.com/office/drawing/2014/main" id="{5A0973E8-4ED0-417A-BB41-D68E3CB28B60}"/>
+              </a:ext>
+            </a:extLst>
+          </p:cNvPr>
+          <p:cNvSpPr>
+            <a:spLocks xmlns:a="http://schemas.openxmlformats.org/drawingml/2006/main" noGrp="1"/>
+          </p:cNvSpPr>
+          <p:nvPr/>
+        </p:nvSpPr>
+        <p:spPr>
+          <a:xfrm xmlns:a="http://schemas.openxmlformats.org/drawingml/2006/main">
+            <a:off x="1162050" y="2200275"/>
+            <a:ext cx="400050" cy="400050"/>
           </a:xfrm>
           <a:prstGeom xmlns:a="http://schemas.openxmlformats.org/drawingml/2006/main" prst="rect">
             <a:avLst/>
@@ -8326,9 +8328,9 @@
           <a:lstStyle xmlns:a="http://schemas.openxmlformats.org/drawingml/2006/main"/>
           <a:p xmlns:a="http://schemas.openxmlformats.org/drawingml/2006/main">
             <a:pPr algn="ctr">
-              <a:defRPr sz="1350" b="1">
-                <a:solidFill>
-                  <a:srgbClr val="FFFFFF"/>
+              <a:defRPr sz="1125" b="1">
+                <a:solidFill>
+                  <a:srgbClr val="2C6E73"/>
                 </a:solidFill>
                 <a:latin typeface="Arial"/>
                 <a:ea typeface="Arial"/>
@@ -8336,9 +8338,9 @@
               </a:defRPr>
             </a:pPr>
             <a:r>
-              <a:rPr sz="1350" b="1">
-                <a:solidFill>
-                  <a:srgbClr val="FFFFFF"/>
+              <a:rPr sz="1125" b="1">
+                <a:solidFill>
+                  <a:srgbClr val="2C6E73"/>
                 </a:solidFill>
                 <a:latin typeface="Arial"/>
                 <a:ea typeface="Arial"/>
@@ -8354,19 +8356,19 @@
           <p:cNvPr id="13" name="">
             <a:extLst xmlns:a="http://schemas.openxmlformats.org/drawingml/2006/main">
               <a:ext uri="{FF2B5EF4-FFF2-40B4-BE49-F238E27FC236}">
-                <a16:creationId xmlns:a16="http://schemas.microsoft.com/office/drawing/2014/main" id="{539645EB-E192-4E6E-A0F1-D81D12EB10F6}"/>
-              </a:ext>
-            </a:extLst>
-          </p:cNvPr>
-          <p:cNvSpPr>
-            <a:spLocks xmlns:a="http://schemas.openxmlformats.org/drawingml/2006/main" noGrp="1"/>
-          </p:cNvSpPr>
-          <p:nvPr/>
-        </p:nvSpPr>
-        <p:spPr>
-          <a:xfrm xmlns:a="http://schemas.openxmlformats.org/drawingml/2006/main">
-            <a:off x="1714500" y="2181225"/>
-            <a:ext cx="9429750" cy="609600"/>
+                <a16:creationId xmlns:a16="http://schemas.microsoft.com/office/drawing/2014/main" id="{B0420D46-8665-4771-9A3E-C682628DAA1F}"/>
+              </a:ext>
+            </a:extLst>
+          </p:cNvPr>
+          <p:cNvSpPr>
+            <a:spLocks xmlns:a="http://schemas.openxmlformats.org/drawingml/2006/main" noGrp="1"/>
+          </p:cNvSpPr>
+          <p:nvPr/>
+        </p:nvSpPr>
+        <p:spPr>
+          <a:xfrm xmlns:a="http://schemas.openxmlformats.org/drawingml/2006/main">
+            <a:off x="1714500" y="2114550"/>
+            <a:ext cx="9525000" cy="809625"/>
           </a:xfrm>
           <a:prstGeom xmlns:a="http://schemas.openxmlformats.org/drawingml/2006/main" prst="rect">
             <a:avLst/>
@@ -8383,7 +8385,7 @@
           <a:lstStyle xmlns:a="http://schemas.openxmlformats.org/drawingml/2006/main"/>
           <a:p xmlns:a="http://schemas.openxmlformats.org/drawingml/2006/main">
             <a:pPr algn="l">
-              <a:defRPr sz="1500" b="0">
+              <a:defRPr sz="1725" b="0">
                 <a:solidFill>
                   <a:srgbClr val="17253A"/>
                 </a:solidFill>
@@ -8393,7 +8395,7 @@
               </a:defRPr>
             </a:pPr>
             <a:r>
-              <a:rPr sz="1500" b="0">
+              <a:rPr sz="1725" b="0">
                 <a:solidFill>
                   <a:srgbClr val="17253A"/>
                 </a:solidFill>
@@ -8401,7 +8403,7 @@
                 <a:ea typeface="Arial"/>
                 <a:cs typeface="Arial"/>
               </a:rPr>
-              <a:t>Identify the structure: Identify the required measure and mark the relevant lengths.</a:t>
+              <a:t>Rectangle 14 cm by 9 cm</a:t>
             </a:r>
           </a:p>
         </p:txBody>
@@ -8411,28 +8413,30 @@
           <p:cNvPr id="14" name="">
             <a:extLst xmlns:a="http://schemas.openxmlformats.org/drawingml/2006/main">
               <a:ext uri="{FF2B5EF4-FFF2-40B4-BE49-F238E27FC236}">
-                <a16:creationId xmlns:a16="http://schemas.microsoft.com/office/drawing/2014/main" id="{56C7A635-6CE2-4E11-AD14-13D0DFDE6FB8}"/>
-              </a:ext>
-            </a:extLst>
-          </p:cNvPr>
-          <p:cNvSpPr>
-            <a:spLocks xmlns:a="http://schemas.openxmlformats.org/drawingml/2006/main" noGrp="1"/>
-          </p:cNvSpPr>
-          <p:nvPr/>
-        </p:nvSpPr>
-        <p:spPr>
-          <a:xfrm xmlns:a="http://schemas.openxmlformats.org/drawingml/2006/main">
-            <a:off x="1000125" y="2990850"/>
-            <a:ext cx="476250" cy="476250"/>
-          </a:xfrm>
-          <a:prstGeom xmlns:a="http://schemas.openxmlformats.org/drawingml/2006/main" prst="ellipse">
+                <a16:creationId xmlns:a16="http://schemas.microsoft.com/office/drawing/2014/main" id="{E7E3B953-51A3-41C7-8BAA-C0B624713D93}"/>
+              </a:ext>
+            </a:extLst>
+          </p:cNvPr>
+          <p:cNvSpPr>
+            <a:spLocks xmlns:a="http://schemas.openxmlformats.org/drawingml/2006/main" noGrp="1"/>
+          </p:cNvSpPr>
+          <p:nvPr/>
+        </p:nvSpPr>
+        <p:spPr>
+          <a:xfrm xmlns:a="http://schemas.openxmlformats.org/drawingml/2006/main">
+            <a:off x="1714500" y="2943225"/>
+            <a:ext cx="9334500" cy="9525"/>
+          </a:xfrm>
+          <a:prstGeom xmlns:a="http://schemas.openxmlformats.org/drawingml/2006/main" prst="rect">
             <a:avLst/>
           </a:prstGeom>
           <a:solidFill xmlns:a="http://schemas.openxmlformats.org/drawingml/2006/main">
-            <a:srgbClr val="2C6E73"/>
+            <a:srgbClr val="D9E0E6"/>
           </a:solidFill>
           <a:ln xmlns:a="http://schemas.openxmlformats.org/drawingml/2006/main" w="0">
-            <a:noFill/>
+            <a:solidFill>
+              <a:srgbClr val="D9E0E6"/>
+            </a:solidFill>
           </a:ln>
         </p:spPr>
       </p:sp>
@@ -8441,19 +8445,19 @@
           <p:cNvPr id="15" name="">
             <a:extLst xmlns:a="http://schemas.openxmlformats.org/drawingml/2006/main">
               <a:ext uri="{FF2B5EF4-FFF2-40B4-BE49-F238E27FC236}">
-                <a16:creationId xmlns:a16="http://schemas.microsoft.com/office/drawing/2014/main" id="{B7809B21-3929-49D4-B40A-706BE78D4684}"/>
-              </a:ext>
-            </a:extLst>
-          </p:cNvPr>
-          <p:cNvSpPr>
-            <a:spLocks xmlns:a="http://schemas.openxmlformats.org/drawingml/2006/main" noGrp="1"/>
-          </p:cNvSpPr>
-          <p:nvPr/>
-        </p:nvSpPr>
-        <p:spPr>
-          <a:xfrm xmlns:a="http://schemas.openxmlformats.org/drawingml/2006/main">
-            <a:off x="1000125" y="3019425"/>
-            <a:ext cx="476250" cy="419100"/>
+                <a16:creationId xmlns:a16="http://schemas.microsoft.com/office/drawing/2014/main" id="{12F0BDFD-C547-41B1-8ED0-60CA1C2A071B}"/>
+              </a:ext>
+            </a:extLst>
+          </p:cNvPr>
+          <p:cNvSpPr>
+            <a:spLocks xmlns:a="http://schemas.openxmlformats.org/drawingml/2006/main" noGrp="1"/>
+          </p:cNvSpPr>
+          <p:nvPr/>
+        </p:nvSpPr>
+        <p:spPr>
+          <a:xfrm xmlns:a="http://schemas.openxmlformats.org/drawingml/2006/main">
+            <a:off x="1162050" y="3076575"/>
+            <a:ext cx="400050" cy="400050"/>
           </a:xfrm>
           <a:prstGeom xmlns:a="http://schemas.openxmlformats.org/drawingml/2006/main" prst="rect">
             <a:avLst/>
@@ -8470,9 +8474,9 @@
           <a:lstStyle xmlns:a="http://schemas.openxmlformats.org/drawingml/2006/main"/>
           <a:p xmlns:a="http://schemas.openxmlformats.org/drawingml/2006/main">
             <a:pPr algn="ctr">
-              <a:defRPr sz="1350" b="1">
-                <a:solidFill>
-                  <a:srgbClr val="FFFFFF"/>
+              <a:defRPr sz="1125" b="1">
+                <a:solidFill>
+                  <a:srgbClr val="2C6E73"/>
                 </a:solidFill>
                 <a:latin typeface="Arial"/>
                 <a:ea typeface="Arial"/>
@@ -8480,9 +8484,9 @@
               </a:defRPr>
             </a:pPr>
             <a:r>
-              <a:rPr sz="1350" b="1">
-                <a:solidFill>
-                  <a:srgbClr val="FFFFFF"/>
+              <a:rPr sz="1125" b="1">
+                <a:solidFill>
+                  <a:srgbClr val="2C6E73"/>
                 </a:solidFill>
                 <a:latin typeface="Arial"/>
                 <a:ea typeface="Arial"/>
@@ -8498,19 +8502,19 @@
           <p:cNvPr id="16" name="">
             <a:extLst xmlns:a="http://schemas.openxmlformats.org/drawingml/2006/main">
               <a:ext uri="{FF2B5EF4-FFF2-40B4-BE49-F238E27FC236}">
-                <a16:creationId xmlns:a16="http://schemas.microsoft.com/office/drawing/2014/main" id="{79C0E523-9A7C-45E5-8901-8716E2D54985}"/>
-              </a:ext>
-            </a:extLst>
-          </p:cNvPr>
-          <p:cNvSpPr>
-            <a:spLocks xmlns:a="http://schemas.openxmlformats.org/drawingml/2006/main" noGrp="1"/>
-          </p:cNvSpPr>
-          <p:nvPr/>
-        </p:nvSpPr>
-        <p:spPr>
-          <a:xfrm xmlns:a="http://schemas.openxmlformats.org/drawingml/2006/main">
-            <a:off x="1714500" y="2924175"/>
-            <a:ext cx="9429750" cy="609600"/>
+                <a16:creationId xmlns:a16="http://schemas.microsoft.com/office/drawing/2014/main" id="{121678FF-DBAA-417D-B65F-0ACFD9BE7209}"/>
+              </a:ext>
+            </a:extLst>
+          </p:cNvPr>
+          <p:cNvSpPr>
+            <a:spLocks xmlns:a="http://schemas.openxmlformats.org/drawingml/2006/main" noGrp="1"/>
+          </p:cNvSpPr>
+          <p:nvPr/>
+        </p:nvSpPr>
+        <p:spPr>
+          <a:xfrm xmlns:a="http://schemas.openxmlformats.org/drawingml/2006/main">
+            <a:off x="1714500" y="2990850"/>
+            <a:ext cx="9525000" cy="809625"/>
           </a:xfrm>
           <a:prstGeom xmlns:a="http://schemas.openxmlformats.org/drawingml/2006/main" prst="rect">
             <a:avLst/>
@@ -8527,7 +8531,7 @@
           <a:lstStyle xmlns:a="http://schemas.openxmlformats.org/drawingml/2006/main"/>
           <a:p xmlns:a="http://schemas.openxmlformats.org/drawingml/2006/main">
             <a:pPr algn="l">
-              <a:defRPr sz="1500" b="0">
+              <a:defRPr sz="1725" b="0">
                 <a:solidFill>
                   <a:srgbClr val="17253A"/>
                 </a:solidFill>
@@ -8537,7 +8541,7 @@
               </a:defRPr>
             </a:pPr>
             <a:r>
-              <a:rPr sz="1500" b="0">
+              <a:rPr sz="1725" b="0">
                 <a:solidFill>
                   <a:srgbClr val="17253A"/>
                 </a:solidFill>
@@ -8545,7 +8549,7 @@
                 <a:ea typeface="Arial"/>
                 <a:cs typeface="Arial"/>
               </a:rPr>
-              <a:t>Set up the method: Use the perpendicular height, not a sloping side, in the area formula.</a:t>
+              <a:t>Area = 14 × 9 = 126 cm²</a:t>
             </a:r>
           </a:p>
         </p:txBody>
@@ -8555,28 +8559,30 @@
           <p:cNvPr id="17" name="">
             <a:extLst xmlns:a="http://schemas.openxmlformats.org/drawingml/2006/main">
               <a:ext uri="{FF2B5EF4-FFF2-40B4-BE49-F238E27FC236}">
-                <a16:creationId xmlns:a16="http://schemas.microsoft.com/office/drawing/2014/main" id="{DB83F50C-32E7-4EEA-A19D-7363A8F985C1}"/>
-              </a:ext>
-            </a:extLst>
-          </p:cNvPr>
-          <p:cNvSpPr>
-            <a:spLocks xmlns:a="http://schemas.openxmlformats.org/drawingml/2006/main" noGrp="1"/>
-          </p:cNvSpPr>
-          <p:nvPr/>
-        </p:nvSpPr>
-        <p:spPr>
-          <a:xfrm xmlns:a="http://schemas.openxmlformats.org/drawingml/2006/main">
-            <a:off x="1000125" y="3733800"/>
-            <a:ext cx="476250" cy="476250"/>
-          </a:xfrm>
-          <a:prstGeom xmlns:a="http://schemas.openxmlformats.org/drawingml/2006/main" prst="ellipse">
+                <a16:creationId xmlns:a16="http://schemas.microsoft.com/office/drawing/2014/main" id="{516AC7D6-8C7B-442B-9E7A-6C7673FD4A08}"/>
+              </a:ext>
+            </a:extLst>
+          </p:cNvPr>
+          <p:cNvSpPr>
+            <a:spLocks xmlns:a="http://schemas.openxmlformats.org/drawingml/2006/main" noGrp="1"/>
+          </p:cNvSpPr>
+          <p:nvPr/>
+        </p:nvSpPr>
+        <p:spPr>
+          <a:xfrm xmlns:a="http://schemas.openxmlformats.org/drawingml/2006/main">
+            <a:off x="1714500" y="3819525"/>
+            <a:ext cx="9334500" cy="9525"/>
+          </a:xfrm>
+          <a:prstGeom xmlns:a="http://schemas.openxmlformats.org/drawingml/2006/main" prst="rect">
             <a:avLst/>
           </a:prstGeom>
           <a:solidFill xmlns:a="http://schemas.openxmlformats.org/drawingml/2006/main">
-            <a:srgbClr val="2C6E73"/>
+            <a:srgbClr val="D9E0E6"/>
           </a:solidFill>
           <a:ln xmlns:a="http://schemas.openxmlformats.org/drawingml/2006/main" w="0">
-            <a:noFill/>
+            <a:solidFill>
+              <a:srgbClr val="D9E0E6"/>
+            </a:solidFill>
           </a:ln>
         </p:spPr>
       </p:sp>
@@ -8585,19 +8591,19 @@
           <p:cNvPr id="18" name="">
             <a:extLst xmlns:a="http://schemas.openxmlformats.org/drawingml/2006/main">
               <a:ext uri="{FF2B5EF4-FFF2-40B4-BE49-F238E27FC236}">
-                <a16:creationId xmlns:a16="http://schemas.microsoft.com/office/drawing/2014/main" id="{0CA82D6F-FE91-49F1-B26D-381B51892757}"/>
-              </a:ext>
-            </a:extLst>
-          </p:cNvPr>
-          <p:cNvSpPr>
-            <a:spLocks xmlns:a="http://schemas.openxmlformats.org/drawingml/2006/main" noGrp="1"/>
-          </p:cNvSpPr>
-          <p:nvPr/>
-        </p:nvSpPr>
-        <p:spPr>
-          <a:xfrm xmlns:a="http://schemas.openxmlformats.org/drawingml/2006/main">
-            <a:off x="1000125" y="3762375"/>
-            <a:ext cx="476250" cy="419100"/>
+                <a16:creationId xmlns:a16="http://schemas.microsoft.com/office/drawing/2014/main" id="{53C5DB47-A1E8-4C29-8C24-E00671272E3D}"/>
+              </a:ext>
+            </a:extLst>
+          </p:cNvPr>
+          <p:cNvSpPr>
+            <a:spLocks xmlns:a="http://schemas.openxmlformats.org/drawingml/2006/main" noGrp="1"/>
+          </p:cNvSpPr>
+          <p:nvPr/>
+        </p:nvSpPr>
+        <p:spPr>
+          <a:xfrm xmlns:a="http://schemas.openxmlformats.org/drawingml/2006/main">
+            <a:off x="1162050" y="3952875"/>
+            <a:ext cx="400050" cy="400050"/>
           </a:xfrm>
           <a:prstGeom xmlns:a="http://schemas.openxmlformats.org/drawingml/2006/main" prst="rect">
             <a:avLst/>
@@ -8614,9 +8620,9 @@
           <a:lstStyle xmlns:a="http://schemas.openxmlformats.org/drawingml/2006/main"/>
           <a:p xmlns:a="http://schemas.openxmlformats.org/drawingml/2006/main">
             <a:pPr algn="ctr">
-              <a:defRPr sz="1350" b="1">
-                <a:solidFill>
-                  <a:srgbClr val="FFFFFF"/>
+              <a:defRPr sz="1125" b="1">
+                <a:solidFill>
+                  <a:srgbClr val="2C6E73"/>
                 </a:solidFill>
                 <a:latin typeface="Arial"/>
                 <a:ea typeface="Arial"/>
@@ -8624,9 +8630,9 @@
               </a:defRPr>
             </a:pPr>
             <a:r>
-              <a:rPr sz="1350" b="1">
-                <a:solidFill>
-                  <a:srgbClr val="FFFFFF"/>
+              <a:rPr sz="1125" b="1">
+                <a:solidFill>
+                  <a:srgbClr val="2C6E73"/>
                 </a:solidFill>
                 <a:latin typeface="Arial"/>
                 <a:ea typeface="Arial"/>
@@ -8642,19 +8648,19 @@
           <p:cNvPr id="19" name="">
             <a:extLst xmlns:a="http://schemas.openxmlformats.org/drawingml/2006/main">
               <a:ext uri="{FF2B5EF4-FFF2-40B4-BE49-F238E27FC236}">
-                <a16:creationId xmlns:a16="http://schemas.microsoft.com/office/drawing/2014/main" id="{71FFF36A-A90C-49E7-B635-0151418B13EF}"/>
-              </a:ext>
-            </a:extLst>
-          </p:cNvPr>
-          <p:cNvSpPr>
-            <a:spLocks xmlns:a="http://schemas.openxmlformats.org/drawingml/2006/main" noGrp="1"/>
-          </p:cNvSpPr>
-          <p:nvPr/>
-        </p:nvSpPr>
-        <p:spPr>
-          <a:xfrm xmlns:a="http://schemas.openxmlformats.org/drawingml/2006/main">
-            <a:off x="1714500" y="3667125"/>
-            <a:ext cx="9429750" cy="609600"/>
+                <a16:creationId xmlns:a16="http://schemas.microsoft.com/office/drawing/2014/main" id="{F4E8E87E-D323-40CD-A72C-452D75284FA6}"/>
+              </a:ext>
+            </a:extLst>
+          </p:cNvPr>
+          <p:cNvSpPr>
+            <a:spLocks xmlns:a="http://schemas.openxmlformats.org/drawingml/2006/main" noGrp="1"/>
+          </p:cNvSpPr>
+          <p:nvPr/>
+        </p:nvSpPr>
+        <p:spPr>
+          <a:xfrm xmlns:a="http://schemas.openxmlformats.org/drawingml/2006/main">
+            <a:off x="1714500" y="3867150"/>
+            <a:ext cx="9525000" cy="809625"/>
           </a:xfrm>
           <a:prstGeom xmlns:a="http://schemas.openxmlformats.org/drawingml/2006/main" prst="rect">
             <a:avLst/>
@@ -8671,7 +8677,7 @@
           <a:lstStyle xmlns:a="http://schemas.openxmlformats.org/drawingml/2006/main"/>
           <a:p xmlns:a="http://schemas.openxmlformats.org/drawingml/2006/main">
             <a:pPr algn="l">
-              <a:defRPr sz="1500" b="0">
+              <a:defRPr sz="1725" b="0">
                 <a:solidFill>
                   <a:srgbClr val="17253A"/>
                 </a:solidFill>
@@ -8681,7 +8687,7 @@
               </a:defRPr>
             </a:pPr>
             <a:r>
-              <a:rPr sz="1500" b="0">
+              <a:rPr sz="1725" b="0">
                 <a:solidFill>
                   <a:srgbClr val="17253A"/>
                 </a:solidFill>
@@ -8689,7 +8695,7 @@
                 <a:ea typeface="Arial"/>
                 <a:cs typeface="Arial"/>
               </a:rPr>
-              <a:t>Complete the calculation: Area 126 cm2; perimeter 46 cm.</a:t>
+              <a:t>Perimeter = 2 × (14 + 9)</a:t>
             </a:r>
           </a:p>
         </p:txBody>
@@ -8699,28 +8705,30 @@
           <p:cNvPr id="20" name="">
             <a:extLst xmlns:a="http://schemas.openxmlformats.org/drawingml/2006/main">
               <a:ext uri="{FF2B5EF4-FFF2-40B4-BE49-F238E27FC236}">
-                <a16:creationId xmlns:a16="http://schemas.microsoft.com/office/drawing/2014/main" id="{E73768A2-9380-4894-9AB9-C320B0637205}"/>
-              </a:ext>
-            </a:extLst>
-          </p:cNvPr>
-          <p:cNvSpPr>
-            <a:spLocks xmlns:a="http://schemas.openxmlformats.org/drawingml/2006/main" noGrp="1"/>
-          </p:cNvSpPr>
-          <p:nvPr/>
-        </p:nvSpPr>
-        <p:spPr>
-          <a:xfrm xmlns:a="http://schemas.openxmlformats.org/drawingml/2006/main">
-            <a:off x="1000125" y="4476750"/>
-            <a:ext cx="476250" cy="476250"/>
-          </a:xfrm>
-          <a:prstGeom xmlns:a="http://schemas.openxmlformats.org/drawingml/2006/main" prst="ellipse">
+                <a16:creationId xmlns:a16="http://schemas.microsoft.com/office/drawing/2014/main" id="{ACBC37CF-1110-4A4E-843A-DC92982987D6}"/>
+              </a:ext>
+            </a:extLst>
+          </p:cNvPr>
+          <p:cNvSpPr>
+            <a:spLocks xmlns:a="http://schemas.openxmlformats.org/drawingml/2006/main" noGrp="1"/>
+          </p:cNvSpPr>
+          <p:nvPr/>
+        </p:nvSpPr>
+        <p:spPr>
+          <a:xfrm xmlns:a="http://schemas.openxmlformats.org/drawingml/2006/main">
+            <a:off x="1714500" y="4695825"/>
+            <a:ext cx="9334500" cy="9525"/>
+          </a:xfrm>
+          <a:prstGeom xmlns:a="http://schemas.openxmlformats.org/drawingml/2006/main" prst="rect">
             <a:avLst/>
           </a:prstGeom>
           <a:solidFill xmlns:a="http://schemas.openxmlformats.org/drawingml/2006/main">
-            <a:srgbClr val="2C6E73"/>
+            <a:srgbClr val="D9E0E6"/>
           </a:solidFill>
           <a:ln xmlns:a="http://schemas.openxmlformats.org/drawingml/2006/main" w="0">
-            <a:noFill/>
+            <a:solidFill>
+              <a:srgbClr val="D9E0E6"/>
+            </a:solidFill>
           </a:ln>
         </p:spPr>
       </p:sp>
@@ -8729,19 +8737,19 @@
           <p:cNvPr id="21" name="">
             <a:extLst xmlns:a="http://schemas.openxmlformats.org/drawingml/2006/main">
               <a:ext uri="{FF2B5EF4-FFF2-40B4-BE49-F238E27FC236}">
-                <a16:creationId xmlns:a16="http://schemas.microsoft.com/office/drawing/2014/main" id="{11161513-EB65-47BE-89FE-C2528394D48C}"/>
-              </a:ext>
-            </a:extLst>
-          </p:cNvPr>
-          <p:cNvSpPr>
-            <a:spLocks xmlns:a="http://schemas.openxmlformats.org/drawingml/2006/main" noGrp="1"/>
-          </p:cNvSpPr>
-          <p:nvPr/>
-        </p:nvSpPr>
-        <p:spPr>
-          <a:xfrm xmlns:a="http://schemas.openxmlformats.org/drawingml/2006/main">
-            <a:off x="1000125" y="4505325"/>
-            <a:ext cx="476250" cy="419100"/>
+                <a16:creationId xmlns:a16="http://schemas.microsoft.com/office/drawing/2014/main" id="{19264129-C96F-4A78-A15F-44559E4D3547}"/>
+              </a:ext>
+            </a:extLst>
+          </p:cNvPr>
+          <p:cNvSpPr>
+            <a:spLocks xmlns:a="http://schemas.openxmlformats.org/drawingml/2006/main" noGrp="1"/>
+          </p:cNvSpPr>
+          <p:nvPr/>
+        </p:nvSpPr>
+        <p:spPr>
+          <a:xfrm xmlns:a="http://schemas.openxmlformats.org/drawingml/2006/main">
+            <a:off x="1162050" y="4829175"/>
+            <a:ext cx="400050" cy="400050"/>
           </a:xfrm>
           <a:prstGeom xmlns:a="http://schemas.openxmlformats.org/drawingml/2006/main" prst="rect">
             <a:avLst/>
@@ -8758,9 +8766,9 @@
           <a:lstStyle xmlns:a="http://schemas.openxmlformats.org/drawingml/2006/main"/>
           <a:p xmlns:a="http://schemas.openxmlformats.org/drawingml/2006/main">
             <a:pPr algn="ctr">
-              <a:defRPr sz="1350" b="1">
-                <a:solidFill>
-                  <a:srgbClr val="FFFFFF"/>
+              <a:defRPr sz="1125" b="1">
+                <a:solidFill>
+                  <a:srgbClr val="2F785D"/>
                 </a:solidFill>
                 <a:latin typeface="Arial"/>
                 <a:ea typeface="Arial"/>
@@ -8768,9 +8776,9 @@
               </a:defRPr>
             </a:pPr>
             <a:r>
-              <a:rPr sz="1350" b="1">
-                <a:solidFill>
-                  <a:srgbClr val="FFFFFF"/>
+              <a:rPr sz="1125" b="1">
+                <a:solidFill>
+                  <a:srgbClr val="2F785D"/>
                 </a:solidFill>
                 <a:latin typeface="Arial"/>
                 <a:ea typeface="Arial"/>
@@ -8786,19 +8794,19 @@
           <p:cNvPr id="22" name="">
             <a:extLst xmlns:a="http://schemas.openxmlformats.org/drawingml/2006/main">
               <a:ext uri="{FF2B5EF4-FFF2-40B4-BE49-F238E27FC236}">
-                <a16:creationId xmlns:a16="http://schemas.microsoft.com/office/drawing/2014/main" id="{767DF6D4-629B-4A0F-BC6C-D71F145C9CEE}"/>
-              </a:ext>
-            </a:extLst>
-          </p:cNvPr>
-          <p:cNvSpPr>
-            <a:spLocks xmlns:a="http://schemas.openxmlformats.org/drawingml/2006/main" noGrp="1"/>
-          </p:cNvSpPr>
-          <p:nvPr/>
-        </p:nvSpPr>
-        <p:spPr>
-          <a:xfrm xmlns:a="http://schemas.openxmlformats.org/drawingml/2006/main">
-            <a:off x="1714500" y="4410075"/>
-            <a:ext cx="9429750" cy="609600"/>
+                <a16:creationId xmlns:a16="http://schemas.microsoft.com/office/drawing/2014/main" id="{5B57BFB0-E7AF-46B0-8F0B-A763458C6319}"/>
+              </a:ext>
+            </a:extLst>
+          </p:cNvPr>
+          <p:cNvSpPr>
+            <a:spLocks xmlns:a="http://schemas.openxmlformats.org/drawingml/2006/main" noGrp="1"/>
+          </p:cNvSpPr>
+          <p:nvPr/>
+        </p:nvSpPr>
+        <p:spPr>
+          <a:xfrm xmlns:a="http://schemas.openxmlformats.org/drawingml/2006/main">
+            <a:off x="1714500" y="4743450"/>
+            <a:ext cx="9525000" cy="809625"/>
           </a:xfrm>
           <a:prstGeom xmlns:a="http://schemas.openxmlformats.org/drawingml/2006/main" prst="rect">
             <a:avLst/>
@@ -8815,7 +8823,7 @@
           <a:lstStyle xmlns:a="http://schemas.openxmlformats.org/drawingml/2006/main"/>
           <a:p xmlns:a="http://schemas.openxmlformats.org/drawingml/2006/main">
             <a:pPr algn="l">
-              <a:defRPr sz="1500" b="1">
+              <a:defRPr sz="1725" b="1">
                 <a:solidFill>
                   <a:srgbClr val="2F785D"/>
                 </a:solidFill>
@@ -8825,7 +8833,7 @@
               </a:defRPr>
             </a:pPr>
             <a:r>
-              <a:rPr sz="1500" b="1">
+              <a:rPr sz="1725" b="1">
                 <a:solidFill>
                   <a:srgbClr val="2F785D"/>
                 </a:solidFill>
@@ -8833,7 +8841,7 @@
                 <a:ea typeface="Arial"/>
                 <a:cs typeface="Arial"/>
               </a:rPr>
-              <a:t>Check the result: Include squared units for area and check by decomposition.</a:t>
+              <a:t>Perimeter = 2 × 23 = 46 cm</a:t>
             </a:r>
           </a:p>
         </p:txBody>
@@ -8841,7 +8849,7 @@
     </p:spTree>
     <p:extLst>
       <p:ext uri="{BB962C8B-B14F-4D97-AF65-F5344CB8AC3E}">
-        <p14:creationId xmlns:p14="http://schemas.microsoft.com/office/powerpoint/2010/main" val="1165816438"/>
+        <p14:creationId xmlns:p14="http://schemas.microsoft.com/office/powerpoint/2010/main" val="630527212"/>
       </p:ext>
     </p:extLst>
   </p:cSld>
@@ -9134,7 +9142,7 @@
           <p:cNvPr id="15" name="">
             <a:extLst xmlns:a="http://schemas.openxmlformats.org/drawingml/2006/main">
               <a:ext uri="{FF2B5EF4-FFF2-40B4-BE49-F238E27FC236}">
-                <a16:creationId xmlns:a16="http://schemas.microsoft.com/office/drawing/2014/main" id="{AB07078B-47D2-4DBD-A236-1AA441379E28}"/>
+                <a16:creationId xmlns:a16="http://schemas.microsoft.com/office/drawing/2014/main" id="{25F2961E-2226-46D8-9B23-B8C670EAD8F6}"/>
               </a:ext>
             </a:extLst>
           </p:cNvPr>
@@ -9166,7 +9174,7 @@
           <p:cNvPr id="2" name="">
             <a:extLst xmlns:a="http://schemas.openxmlformats.org/drawingml/2006/main">
               <a:ext uri="{FF2B5EF4-FFF2-40B4-BE49-F238E27FC236}">
-                <a16:creationId xmlns:a16="http://schemas.microsoft.com/office/drawing/2014/main" id="{31FEBC55-1BD9-4542-A82A-FEDEB51F9784}"/>
+                <a16:creationId xmlns:a16="http://schemas.microsoft.com/office/drawing/2014/main" id="{429830B7-B43A-422B-B1F0-8B910862216F}"/>
               </a:ext>
             </a:extLst>
           </p:cNvPr>
@@ -9223,7 +9231,7 @@
           <p:cNvPr id="3" name="">
             <a:extLst xmlns:a="http://schemas.openxmlformats.org/drawingml/2006/main">
               <a:ext uri="{FF2B5EF4-FFF2-40B4-BE49-F238E27FC236}">
-                <a16:creationId xmlns:a16="http://schemas.microsoft.com/office/drawing/2014/main" id="{3A5C1DBE-FAD3-43FA-8557-F9709DA36B4A}"/>
+                <a16:creationId xmlns:a16="http://schemas.microsoft.com/office/drawing/2014/main" id="{90BFF686-37A2-4B2E-B1C2-C3F99C6A076F}"/>
               </a:ext>
             </a:extLst>
           </p:cNvPr>
@@ -9255,7 +9263,7 @@
           <p:cNvPr id="4" name="">
             <a:extLst xmlns:a="http://schemas.openxmlformats.org/drawingml/2006/main">
               <a:ext uri="{FF2B5EF4-FFF2-40B4-BE49-F238E27FC236}">
-                <a16:creationId xmlns:a16="http://schemas.microsoft.com/office/drawing/2014/main" id="{5443C3F0-7973-4CC6-A3A3-CBFCA66E9809}"/>
+                <a16:creationId xmlns:a16="http://schemas.microsoft.com/office/drawing/2014/main" id="{3FE40D74-8A38-4B50-8C53-AEB7C9FB2060}"/>
               </a:ext>
             </a:extLst>
           </p:cNvPr>
@@ -9312,7 +9320,7 @@
           <p:cNvPr id="5" name="">
             <a:extLst xmlns:a="http://schemas.openxmlformats.org/drawingml/2006/main">
               <a:ext uri="{FF2B5EF4-FFF2-40B4-BE49-F238E27FC236}">
-                <a16:creationId xmlns:a16="http://schemas.microsoft.com/office/drawing/2014/main" id="{90B715F3-F9D7-4295-8F0D-AEB800028CA3}"/>
+                <a16:creationId xmlns:a16="http://schemas.microsoft.com/office/drawing/2014/main" id="{45992531-45D6-4005-9A47-1ED3B3507F5F}"/>
               </a:ext>
             </a:extLst>
           </p:cNvPr>
@@ -9369,7 +9377,7 @@
           <p:cNvPr id="6" name="">
             <a:extLst xmlns:a="http://schemas.openxmlformats.org/drawingml/2006/main">
               <a:ext uri="{FF2B5EF4-FFF2-40B4-BE49-F238E27FC236}">
-                <a16:creationId xmlns:a16="http://schemas.microsoft.com/office/drawing/2014/main" id="{1E4E3879-5D57-4EC7-9FC1-A2B663079F7A}"/>
+                <a16:creationId xmlns:a16="http://schemas.microsoft.com/office/drawing/2014/main" id="{4BD59A8D-D654-4751-939F-CAA328ECA816}"/>
               </a:ext>
             </a:extLst>
           </p:cNvPr>
@@ -9426,7 +9434,7 @@
           <p:cNvPr id="7" name="">
             <a:extLst xmlns:a="http://schemas.openxmlformats.org/drawingml/2006/main">
               <a:ext uri="{FF2B5EF4-FFF2-40B4-BE49-F238E27FC236}">
-                <a16:creationId xmlns:a16="http://schemas.microsoft.com/office/drawing/2014/main" id="{FA387D8C-5A18-4FA9-8F61-9D8E70FB3AE1}"/>
+                <a16:creationId xmlns:a16="http://schemas.microsoft.com/office/drawing/2014/main" id="{E7B12B10-F9BB-4EE9-926A-A85B0EA45B2A}"/>
               </a:ext>
             </a:extLst>
           </p:cNvPr>
@@ -9458,7 +9466,7 @@
           <p:cNvPr id="8" name="">
             <a:extLst xmlns:a="http://schemas.openxmlformats.org/drawingml/2006/main">
               <a:ext uri="{FF2B5EF4-FFF2-40B4-BE49-F238E27FC236}">
-                <a16:creationId xmlns:a16="http://schemas.microsoft.com/office/drawing/2014/main" id="{C40B1E89-0845-4087-B829-6A522484111A}"/>
+                <a16:creationId xmlns:a16="http://schemas.microsoft.com/office/drawing/2014/main" id="{2A2E2512-1068-4EB9-946A-64F935DF1794}"/>
               </a:ext>
             </a:extLst>
           </p:cNvPr>
@@ -9515,7 +9523,7 @@
           <p:cNvPr id="9" name="">
             <a:extLst xmlns:a="http://schemas.openxmlformats.org/drawingml/2006/main">
               <a:ext uri="{FF2B5EF4-FFF2-40B4-BE49-F238E27FC236}">
-                <a16:creationId xmlns:a16="http://schemas.microsoft.com/office/drawing/2014/main" id="{172F6985-7AF8-472F-8AB2-C5AA803C30F4}"/>
+                <a16:creationId xmlns:a16="http://schemas.microsoft.com/office/drawing/2014/main" id="{03D5149B-5F62-4B99-859F-E07D374AA9A5}"/>
               </a:ext>
             </a:extLst>
           </p:cNvPr>
@@ -9572,7 +9580,7 @@
           <p:cNvPr id="10" name="">
             <a:extLst xmlns:a="http://schemas.openxmlformats.org/drawingml/2006/main">
               <a:ext uri="{FF2B5EF4-FFF2-40B4-BE49-F238E27FC236}">
-                <a16:creationId xmlns:a16="http://schemas.microsoft.com/office/drawing/2014/main" id="{2B1ED47C-A3D9-4E17-BE4B-92A0A4771C80}"/>
+                <a16:creationId xmlns:a16="http://schemas.microsoft.com/office/drawing/2014/main" id="{476F1C81-A924-4CAE-B29F-6C7652DE8F74}"/>
               </a:ext>
             </a:extLst>
           </p:cNvPr>
@@ -9629,7 +9637,7 @@
           <p:cNvPr id="11" name="">
             <a:extLst xmlns:a="http://schemas.openxmlformats.org/drawingml/2006/main">
               <a:ext uri="{FF2B5EF4-FFF2-40B4-BE49-F238E27FC236}">
-                <a16:creationId xmlns:a16="http://schemas.microsoft.com/office/drawing/2014/main" id="{5AF2DF7A-C6DD-44BF-82EE-C0AFF65BF27D}"/>
+                <a16:creationId xmlns:a16="http://schemas.microsoft.com/office/drawing/2014/main" id="{58907FC3-3DCF-4BB2-90E9-0592543E3164}"/>
               </a:ext>
             </a:extLst>
           </p:cNvPr>
@@ -9686,7 +9694,7 @@
           <p:cNvPr id="12" name="">
             <a:extLst xmlns:a="http://schemas.openxmlformats.org/drawingml/2006/main">
               <a:ext uri="{FF2B5EF4-FFF2-40B4-BE49-F238E27FC236}">
-                <a16:creationId xmlns:a16="http://schemas.microsoft.com/office/drawing/2014/main" id="{2D1D43CF-3E80-45D4-9ADE-7CE3DD846AE0}"/>
+                <a16:creationId xmlns:a16="http://schemas.microsoft.com/office/drawing/2014/main" id="{57EF8993-342C-4851-80DF-76B459907B89}"/>
               </a:ext>
             </a:extLst>
           </p:cNvPr>
@@ -9718,7 +9726,7 @@
           <p:cNvPr id="13" name="">
             <a:extLst xmlns:a="http://schemas.openxmlformats.org/drawingml/2006/main">
               <a:ext uri="{FF2B5EF4-FFF2-40B4-BE49-F238E27FC236}">
-                <a16:creationId xmlns:a16="http://schemas.microsoft.com/office/drawing/2014/main" id="{EF617679-B835-4F76-BF58-3690E955573E}"/>
+                <a16:creationId xmlns:a16="http://schemas.microsoft.com/office/drawing/2014/main" id="{243B3E0C-CC09-4EE0-AEF0-0B4F5BFE24E9}"/>
               </a:ext>
             </a:extLst>
           </p:cNvPr>
@@ -9775,7 +9783,7 @@
           <p:cNvPr id="14" name="">
             <a:extLst xmlns:a="http://schemas.openxmlformats.org/drawingml/2006/main">
               <a:ext uri="{FF2B5EF4-FFF2-40B4-BE49-F238E27FC236}">
-                <a16:creationId xmlns:a16="http://schemas.microsoft.com/office/drawing/2014/main" id="{8DF4B227-0787-42D6-BDED-377D74BE38F0}"/>
+                <a16:creationId xmlns:a16="http://schemas.microsoft.com/office/drawing/2014/main" id="{99349853-9F72-43DB-B71B-058565DDB733}"/>
               </a:ext>
             </a:extLst>
           </p:cNvPr>
@@ -9830,7 +9838,7 @@
     </p:spTree>
     <p:extLst>
       <p:ext uri="{BB962C8B-B14F-4D97-AF65-F5344CB8AC3E}">
-        <p14:creationId xmlns:p14="http://schemas.microsoft.com/office/powerpoint/2010/main" val="1468979225"/>
+        <p14:creationId xmlns:p14="http://schemas.microsoft.com/office/powerpoint/2010/main" val="761480323"/>
       </p:ext>
     </p:extLst>
   </p:cSld>
@@ -10031,7 +10039,7 @@
           <p:cNvPr id="16" name="">
             <a:extLst xmlns:a="http://schemas.openxmlformats.org/drawingml/2006/main">
               <a:ext uri="{FF2B5EF4-FFF2-40B4-BE49-F238E27FC236}">
-                <a16:creationId xmlns:a16="http://schemas.microsoft.com/office/drawing/2014/main" id="{D0B2E7C3-F8B0-4FA4-95EC-BECD8F2CC164}"/>
+                <a16:creationId xmlns:a16="http://schemas.microsoft.com/office/drawing/2014/main" id="{356680F1-6C1B-4B69-A388-036C41246F85}"/>
               </a:ext>
             </a:extLst>
           </p:cNvPr>
@@ -10063,7 +10071,7 @@
           <p:cNvPr id="2" name="">
             <a:extLst xmlns:a="http://schemas.openxmlformats.org/drawingml/2006/main">
               <a:ext uri="{FF2B5EF4-FFF2-40B4-BE49-F238E27FC236}">
-                <a16:creationId xmlns:a16="http://schemas.microsoft.com/office/drawing/2014/main" id="{A9197796-D990-419C-BBED-75D054A68708}"/>
+                <a16:creationId xmlns:a16="http://schemas.microsoft.com/office/drawing/2014/main" id="{334ACF41-E5B1-4B63-BD7D-A3F2099DD590}"/>
               </a:ext>
             </a:extLst>
           </p:cNvPr>
@@ -10120,7 +10128,7 @@
           <p:cNvPr id="3" name="">
             <a:extLst xmlns:a="http://schemas.openxmlformats.org/drawingml/2006/main">
               <a:ext uri="{FF2B5EF4-FFF2-40B4-BE49-F238E27FC236}">
-                <a16:creationId xmlns:a16="http://schemas.microsoft.com/office/drawing/2014/main" id="{81540B17-269D-4EF5-9A56-CF6B79C55EC7}"/>
+                <a16:creationId xmlns:a16="http://schemas.microsoft.com/office/drawing/2014/main" id="{48C80176-C185-4366-B1FA-736185C5D207}"/>
               </a:ext>
             </a:extLst>
           </p:cNvPr>
@@ -10152,7 +10160,7 @@
           <p:cNvPr id="4" name="">
             <a:extLst xmlns:a="http://schemas.openxmlformats.org/drawingml/2006/main">
               <a:ext uri="{FF2B5EF4-FFF2-40B4-BE49-F238E27FC236}">
-                <a16:creationId xmlns:a16="http://schemas.microsoft.com/office/drawing/2014/main" id="{C00A33EA-AC88-4DD7-AD36-EA885B78095F}"/>
+                <a16:creationId xmlns:a16="http://schemas.microsoft.com/office/drawing/2014/main" id="{A826F17F-BEB2-48F9-8F9E-F2881A4A273C}"/>
               </a:ext>
             </a:extLst>
           </p:cNvPr>
@@ -10209,7 +10217,7 @@
           <p:cNvPr id="5" name="">
             <a:extLst xmlns:a="http://schemas.openxmlformats.org/drawingml/2006/main">
               <a:ext uri="{FF2B5EF4-FFF2-40B4-BE49-F238E27FC236}">
-                <a16:creationId xmlns:a16="http://schemas.microsoft.com/office/drawing/2014/main" id="{1195B3E3-8251-4DFC-B756-11CE4E135B34}"/>
+                <a16:creationId xmlns:a16="http://schemas.microsoft.com/office/drawing/2014/main" id="{90C28F93-5F04-4794-9A61-A2105152EA70}"/>
               </a:ext>
             </a:extLst>
           </p:cNvPr>
@@ -10266,7 +10274,7 @@
           <p:cNvPr id="6" name="">
             <a:extLst xmlns:a="http://schemas.openxmlformats.org/drawingml/2006/main">
               <a:ext uri="{FF2B5EF4-FFF2-40B4-BE49-F238E27FC236}">
-                <a16:creationId xmlns:a16="http://schemas.microsoft.com/office/drawing/2014/main" id="{617C3F4B-E4FE-49BE-A71A-716C699CC61C}"/>
+                <a16:creationId xmlns:a16="http://schemas.microsoft.com/office/drawing/2014/main" id="{D95F9470-E182-41A5-981E-066DDC6DCEB7}"/>
               </a:ext>
             </a:extLst>
           </p:cNvPr>
@@ -10323,7 +10331,7 @@
           <p:cNvPr id="7" name="">
             <a:extLst xmlns:a="http://schemas.openxmlformats.org/drawingml/2006/main">
               <a:ext uri="{FF2B5EF4-FFF2-40B4-BE49-F238E27FC236}">
-                <a16:creationId xmlns:a16="http://schemas.microsoft.com/office/drawing/2014/main" id="{7E0A1FCC-CCC3-42BB-AE42-177C295ED145}"/>
+                <a16:creationId xmlns:a16="http://schemas.microsoft.com/office/drawing/2014/main" id="{4C67F9E0-C853-422D-82C7-91E26852CA6A}"/>
               </a:ext>
             </a:extLst>
           </p:cNvPr>
@@ -10355,7 +10363,7 @@
           <p:cNvPr id="8" name="">
             <a:extLst xmlns:a="http://schemas.openxmlformats.org/drawingml/2006/main">
               <a:ext uri="{FF2B5EF4-FFF2-40B4-BE49-F238E27FC236}">
-                <a16:creationId xmlns:a16="http://schemas.microsoft.com/office/drawing/2014/main" id="{8D510666-A477-4A6A-BF9D-63F0DC18E76E}"/>
+                <a16:creationId xmlns:a16="http://schemas.microsoft.com/office/drawing/2014/main" id="{12D4A237-742F-4D20-A225-273C65B8B01A}"/>
               </a:ext>
             </a:extLst>
           </p:cNvPr>
@@ -10412,7 +10420,7 @@
           <p:cNvPr id="9" name="">
             <a:extLst xmlns:a="http://schemas.openxmlformats.org/drawingml/2006/main">
               <a:ext uri="{FF2B5EF4-FFF2-40B4-BE49-F238E27FC236}">
-                <a16:creationId xmlns:a16="http://schemas.microsoft.com/office/drawing/2014/main" id="{577BCF49-410D-4B48-80C8-B982E7FFB654}"/>
+                <a16:creationId xmlns:a16="http://schemas.microsoft.com/office/drawing/2014/main" id="{6D176B5D-4C73-4C18-88E4-B52DAD59B1E3}"/>
               </a:ext>
             </a:extLst>
           </p:cNvPr>
@@ -10469,7 +10477,7 @@
           <p:cNvPr id="10" name="">
             <a:extLst xmlns:a="http://schemas.openxmlformats.org/drawingml/2006/main">
               <a:ext uri="{FF2B5EF4-FFF2-40B4-BE49-F238E27FC236}">
-                <a16:creationId xmlns:a16="http://schemas.microsoft.com/office/drawing/2014/main" id="{7A7914DC-FB3D-40FC-8535-89116D124EA6}"/>
+                <a16:creationId xmlns:a16="http://schemas.microsoft.com/office/drawing/2014/main" id="{3E1501EE-8B20-445D-A1D9-A22C915F2DC8}"/>
               </a:ext>
             </a:extLst>
           </p:cNvPr>
@@ -10526,7 +10534,7 @@
           <p:cNvPr id="11" name="">
             <a:extLst xmlns:a="http://schemas.openxmlformats.org/drawingml/2006/main">
               <a:ext uri="{FF2B5EF4-FFF2-40B4-BE49-F238E27FC236}">
-                <a16:creationId xmlns:a16="http://schemas.microsoft.com/office/drawing/2014/main" id="{626FF898-388A-4BE8-8A90-971ACF545F1A}"/>
+                <a16:creationId xmlns:a16="http://schemas.microsoft.com/office/drawing/2014/main" id="{BD0E7B6F-110E-4668-9C1E-8B5ECA344152}"/>
               </a:ext>
             </a:extLst>
           </p:cNvPr>
@@ -10583,7 +10591,7 @@
           <p:cNvPr id="12" name="">
             <a:extLst xmlns:a="http://schemas.openxmlformats.org/drawingml/2006/main">
               <a:ext uri="{FF2B5EF4-FFF2-40B4-BE49-F238E27FC236}">
-                <a16:creationId xmlns:a16="http://schemas.microsoft.com/office/drawing/2014/main" id="{079C0573-179C-4551-895F-C9DA419A40A8}"/>
+                <a16:creationId xmlns:a16="http://schemas.microsoft.com/office/drawing/2014/main" id="{EE1C32BB-A644-4E4F-A52A-9B8FB0D000F1}"/>
               </a:ext>
             </a:extLst>
           </p:cNvPr>
@@ -10640,7 +10648,7 @@
           <p:cNvPr id="13" name="">
             <a:extLst xmlns:a="http://schemas.openxmlformats.org/drawingml/2006/main">
               <a:ext uri="{FF2B5EF4-FFF2-40B4-BE49-F238E27FC236}">
-                <a16:creationId xmlns:a16="http://schemas.microsoft.com/office/drawing/2014/main" id="{FA75686B-EBD1-4BE0-83E6-2B4A23C962A6}"/>
+                <a16:creationId xmlns:a16="http://schemas.microsoft.com/office/drawing/2014/main" id="{CCF4DC3F-0D49-4D0C-902C-39CA732C5633}"/>
               </a:ext>
             </a:extLst>
           </p:cNvPr>
@@ -10697,7 +10705,7 @@
           <p:cNvPr id="14" name="">
             <a:extLst xmlns:a="http://schemas.openxmlformats.org/drawingml/2006/main">
               <a:ext uri="{FF2B5EF4-FFF2-40B4-BE49-F238E27FC236}">
-                <a16:creationId xmlns:a16="http://schemas.microsoft.com/office/drawing/2014/main" id="{8C57C6CB-0CF7-4EBD-8706-25FF5DAB0F5F}"/>
+                <a16:creationId xmlns:a16="http://schemas.microsoft.com/office/drawing/2014/main" id="{F8530188-2104-4731-A523-6AF955603605}"/>
               </a:ext>
             </a:extLst>
           </p:cNvPr>
@@ -10754,7 +10762,7 @@
           <p:cNvPr id="15" name="">
             <a:extLst xmlns:a="http://schemas.openxmlformats.org/drawingml/2006/main">
               <a:ext uri="{FF2B5EF4-FFF2-40B4-BE49-F238E27FC236}">
-                <a16:creationId xmlns:a16="http://schemas.microsoft.com/office/drawing/2014/main" id="{09921FF3-0096-4149-8697-E1190E6FEB57}"/>
+                <a16:creationId xmlns:a16="http://schemas.microsoft.com/office/drawing/2014/main" id="{F1E86E8F-E240-485D-985B-4A138351A07F}"/>
               </a:ext>
             </a:extLst>
           </p:cNvPr>
@@ -10809,7 +10817,7 @@
     </p:spTree>
     <p:extLst>
       <p:ext uri="{BB962C8B-B14F-4D97-AF65-F5344CB8AC3E}">
-        <p14:creationId xmlns:p14="http://schemas.microsoft.com/office/powerpoint/2010/main" val="266676538"/>
+        <p14:creationId xmlns:p14="http://schemas.microsoft.com/office/powerpoint/2010/main" val="1591629227"/>
       </p:ext>
     </p:extLst>
   </p:cSld>
@@ -10964,7 +10972,7 @@
           <p:cNvPr id="16" name="">
             <a:extLst xmlns:a="http://schemas.openxmlformats.org/drawingml/2006/main">
               <a:ext uri="{FF2B5EF4-FFF2-40B4-BE49-F238E27FC236}">
-                <a16:creationId xmlns:a16="http://schemas.microsoft.com/office/drawing/2014/main" id="{52E56332-BE15-40B6-BE1F-29C5144BD526}"/>
+                <a16:creationId xmlns:a16="http://schemas.microsoft.com/office/drawing/2014/main" id="{D988BEF7-4CAC-4C86-9226-574FD5F0DD0A}"/>
               </a:ext>
             </a:extLst>
           </p:cNvPr>
@@ -10996,7 +11004,7 @@
           <p:cNvPr id="2" name="">
             <a:extLst xmlns:a="http://schemas.openxmlformats.org/drawingml/2006/main">
               <a:ext uri="{FF2B5EF4-FFF2-40B4-BE49-F238E27FC236}">
-                <a16:creationId xmlns:a16="http://schemas.microsoft.com/office/drawing/2014/main" id="{2CD86B4D-02A3-42E4-8A78-E02DDC0F5F05}"/>
+                <a16:creationId xmlns:a16="http://schemas.microsoft.com/office/drawing/2014/main" id="{AA978736-A936-4ECB-B0D6-B3E4C4A7A9FC}"/>
               </a:ext>
             </a:extLst>
           </p:cNvPr>
@@ -11053,7 +11061,7 @@
           <p:cNvPr id="3" name="">
             <a:extLst xmlns:a="http://schemas.openxmlformats.org/drawingml/2006/main">
               <a:ext uri="{FF2B5EF4-FFF2-40B4-BE49-F238E27FC236}">
-                <a16:creationId xmlns:a16="http://schemas.microsoft.com/office/drawing/2014/main" id="{8164DE1E-D0CA-4BFC-BEBD-C7C6875C9395}"/>
+                <a16:creationId xmlns:a16="http://schemas.microsoft.com/office/drawing/2014/main" id="{EB3A8A3A-4F28-4859-8377-C9AD568C2AE1}"/>
               </a:ext>
             </a:extLst>
           </p:cNvPr>
@@ -11085,7 +11093,7 @@
           <p:cNvPr id="4" name="">
             <a:extLst xmlns:a="http://schemas.openxmlformats.org/drawingml/2006/main">
               <a:ext uri="{FF2B5EF4-FFF2-40B4-BE49-F238E27FC236}">
-                <a16:creationId xmlns:a16="http://schemas.microsoft.com/office/drawing/2014/main" id="{9B7A4AA8-A468-4467-A217-190C9C4F656B}"/>
+                <a16:creationId xmlns:a16="http://schemas.microsoft.com/office/drawing/2014/main" id="{B71DDDBA-6A89-4BB6-899F-8E26A6B09FB9}"/>
               </a:ext>
             </a:extLst>
           </p:cNvPr>
@@ -11142,7 +11150,7 @@
           <p:cNvPr id="5" name="">
             <a:extLst xmlns:a="http://schemas.openxmlformats.org/drawingml/2006/main">
               <a:ext uri="{FF2B5EF4-FFF2-40B4-BE49-F238E27FC236}">
-                <a16:creationId xmlns:a16="http://schemas.microsoft.com/office/drawing/2014/main" id="{595B745D-4460-4F67-9FE1-383308017881}"/>
+                <a16:creationId xmlns:a16="http://schemas.microsoft.com/office/drawing/2014/main" id="{E37853DA-0178-4C3B-9051-2897C71CDB67}"/>
               </a:ext>
             </a:extLst>
           </p:cNvPr>
@@ -11199,7 +11207,7 @@
           <p:cNvPr id="6" name="">
             <a:extLst xmlns:a="http://schemas.openxmlformats.org/drawingml/2006/main">
               <a:ext uri="{FF2B5EF4-FFF2-40B4-BE49-F238E27FC236}">
-                <a16:creationId xmlns:a16="http://schemas.microsoft.com/office/drawing/2014/main" id="{7850DD4D-3FAF-43A0-924D-C197F7BC2841}"/>
+                <a16:creationId xmlns:a16="http://schemas.microsoft.com/office/drawing/2014/main" id="{1A2147CF-D8A9-4CD8-AC4C-CE1202B9926C}"/>
               </a:ext>
             </a:extLst>
           </p:cNvPr>
@@ -11256,7 +11264,7 @@
           <p:cNvPr id="7" name="">
             <a:extLst xmlns:a="http://schemas.openxmlformats.org/drawingml/2006/main">
               <a:ext uri="{FF2B5EF4-FFF2-40B4-BE49-F238E27FC236}">
-                <a16:creationId xmlns:a16="http://schemas.microsoft.com/office/drawing/2014/main" id="{33E13648-3D8E-4F3F-84F2-6E0C11E6BE39}"/>
+                <a16:creationId xmlns:a16="http://schemas.microsoft.com/office/drawing/2014/main" id="{96455019-53A4-4209-8981-9A3428E202F7}"/>
               </a:ext>
             </a:extLst>
           </p:cNvPr>
@@ -11288,7 +11296,7 @@
           <p:cNvPr id="8" name="">
             <a:extLst xmlns:a="http://schemas.openxmlformats.org/drawingml/2006/main">
               <a:ext uri="{FF2B5EF4-FFF2-40B4-BE49-F238E27FC236}">
-                <a16:creationId xmlns:a16="http://schemas.microsoft.com/office/drawing/2014/main" id="{95C9DC3F-42A6-4F4E-A39C-5A1DDD0B4EF6}"/>
+                <a16:creationId xmlns:a16="http://schemas.microsoft.com/office/drawing/2014/main" id="{79E8E9BE-678C-4587-905D-B6185852629B}"/>
               </a:ext>
             </a:extLst>
           </p:cNvPr>
@@ -11345,7 +11353,7 @@
           <p:cNvPr id="9" name="">
             <a:extLst xmlns:a="http://schemas.openxmlformats.org/drawingml/2006/main">
               <a:ext uri="{FF2B5EF4-FFF2-40B4-BE49-F238E27FC236}">
-                <a16:creationId xmlns:a16="http://schemas.microsoft.com/office/drawing/2014/main" id="{42693B28-B9FD-4D80-A036-723A59BA6FFB}"/>
+                <a16:creationId xmlns:a16="http://schemas.microsoft.com/office/drawing/2014/main" id="{1FB163D7-4245-4A2E-8A04-2C0253B3EF08}"/>
               </a:ext>
             </a:extLst>
           </p:cNvPr>
@@ -11406,7 +11414,7 @@
           <p:nvPr/>
         </p:nvPicPr>
         <p:blipFill>
-          <a:blip xmlns:r="http://schemas.openxmlformats.org/officeDocument/2006/relationships" xmlns:a="http://schemas.openxmlformats.org/drawingml/2006/main" r:embed="R83e4a937888d4c58"/>
+          <a:blip xmlns:r="http://schemas.openxmlformats.org/officeDocument/2006/relationships" xmlns:a="http://schemas.openxmlformats.org/drawingml/2006/main" r:embed="R68cfac778c1d45bf"/>
           <a:stretch xmlns:a="http://schemas.openxmlformats.org/drawingml/2006/main"/>
         </p:blipFill>
         <p:spPr>
@@ -11424,7 +11432,7 @@
           <p:cNvPr id="11" name="">
             <a:extLst xmlns:a="http://schemas.openxmlformats.org/drawingml/2006/main">
               <a:ext uri="{FF2B5EF4-FFF2-40B4-BE49-F238E27FC236}">
-                <a16:creationId xmlns:a16="http://schemas.microsoft.com/office/drawing/2014/main" id="{9FDC167D-C305-46FA-A085-7874596CA9AD}"/>
+                <a16:creationId xmlns:a16="http://schemas.microsoft.com/office/drawing/2014/main" id="{3C52B257-28E1-492E-8411-72785FC0C011}"/>
               </a:ext>
             </a:extLst>
           </p:cNvPr>
@@ -11481,7 +11489,7 @@
           <p:cNvPr id="12" name="">
             <a:extLst xmlns:a="http://schemas.openxmlformats.org/drawingml/2006/main">
               <a:ext uri="{FF2B5EF4-FFF2-40B4-BE49-F238E27FC236}">
-                <a16:creationId xmlns:a16="http://schemas.microsoft.com/office/drawing/2014/main" id="{6652276C-4056-4FDD-AE30-448EBBE2A261}"/>
+                <a16:creationId xmlns:a16="http://schemas.microsoft.com/office/drawing/2014/main" id="{A40D5F9D-ACC3-47A4-B27A-E697DBC463BA}"/>
               </a:ext>
             </a:extLst>
           </p:cNvPr>
@@ -11538,7 +11546,7 @@
           <p:cNvPr id="13" name="">
             <a:extLst xmlns:a="http://schemas.openxmlformats.org/drawingml/2006/main">
               <a:ext uri="{FF2B5EF4-FFF2-40B4-BE49-F238E27FC236}">
-                <a16:creationId xmlns:a16="http://schemas.microsoft.com/office/drawing/2014/main" id="{04D3652D-E3EF-47F9-874B-DC4E877A1AE4}"/>
+                <a16:creationId xmlns:a16="http://schemas.microsoft.com/office/drawing/2014/main" id="{FF6259D3-37EE-4D8C-A09F-B1B57DC78016}"/>
               </a:ext>
             </a:extLst>
           </p:cNvPr>
@@ -11570,7 +11578,7 @@
           <p:cNvPr id="14" name="">
             <a:extLst xmlns:a="http://schemas.openxmlformats.org/drawingml/2006/main">
               <a:ext uri="{FF2B5EF4-FFF2-40B4-BE49-F238E27FC236}">
-                <a16:creationId xmlns:a16="http://schemas.microsoft.com/office/drawing/2014/main" id="{0218874B-F065-453C-B389-AEF5BF34C5AD}"/>
+                <a16:creationId xmlns:a16="http://schemas.microsoft.com/office/drawing/2014/main" id="{CB1B1FEB-F966-4E1C-9DAE-ACD98F7199B8}"/>
               </a:ext>
             </a:extLst>
           </p:cNvPr>
@@ -11627,7 +11635,7 @@
           <p:cNvPr id="15" name="">
             <a:extLst xmlns:a="http://schemas.openxmlformats.org/drawingml/2006/main">
               <a:ext uri="{FF2B5EF4-FFF2-40B4-BE49-F238E27FC236}">
-                <a16:creationId xmlns:a16="http://schemas.microsoft.com/office/drawing/2014/main" id="{6103D913-A455-4497-9C1B-9C9F91BC9ECF}"/>
+                <a16:creationId xmlns:a16="http://schemas.microsoft.com/office/drawing/2014/main" id="{672ECF9F-0FB0-41B7-A3DB-12FE01A31B53}"/>
               </a:ext>
             </a:extLst>
           </p:cNvPr>
@@ -11682,7 +11690,7 @@
     </p:spTree>
     <p:extLst>
       <p:ext uri="{BB962C8B-B14F-4D97-AF65-F5344CB8AC3E}">
-        <p14:creationId xmlns:p14="http://schemas.microsoft.com/office/powerpoint/2010/main" val="1477700352"/>
+        <p14:creationId xmlns:p14="http://schemas.microsoft.com/office/powerpoint/2010/main" val="2129099801"/>
       </p:ext>
     </p:extLst>
   </p:cSld>
@@ -11837,7 +11845,7 @@
           <p:cNvPr id="23" name="">
             <a:extLst xmlns:a="http://schemas.openxmlformats.org/drawingml/2006/main">
               <a:ext uri="{FF2B5EF4-FFF2-40B4-BE49-F238E27FC236}">
-                <a16:creationId xmlns:a16="http://schemas.microsoft.com/office/drawing/2014/main" id="{D180591B-2665-4BDC-8978-F06797991BAF}"/>
+                <a16:creationId xmlns:a16="http://schemas.microsoft.com/office/drawing/2014/main" id="{B0D22E6F-B026-4440-B15F-87FEE4260428}"/>
               </a:ext>
             </a:extLst>
           </p:cNvPr>
@@ -11869,7 +11877,7 @@
           <p:cNvPr id="2" name="">
             <a:extLst xmlns:a="http://schemas.openxmlformats.org/drawingml/2006/main">
               <a:ext uri="{FF2B5EF4-FFF2-40B4-BE49-F238E27FC236}">
-                <a16:creationId xmlns:a16="http://schemas.microsoft.com/office/drawing/2014/main" id="{3AA5AF17-173B-467B-B746-445470A7DEFC}"/>
+                <a16:creationId xmlns:a16="http://schemas.microsoft.com/office/drawing/2014/main" id="{502538AB-2262-48AA-A73F-5D37BE44EC2C}"/>
               </a:ext>
             </a:extLst>
           </p:cNvPr>
@@ -11926,7 +11934,7 @@
           <p:cNvPr id="3" name="">
             <a:extLst xmlns:a="http://schemas.openxmlformats.org/drawingml/2006/main">
               <a:ext uri="{FF2B5EF4-FFF2-40B4-BE49-F238E27FC236}">
-                <a16:creationId xmlns:a16="http://schemas.microsoft.com/office/drawing/2014/main" id="{1E78D743-359A-4235-8854-F809387C4660}"/>
+                <a16:creationId xmlns:a16="http://schemas.microsoft.com/office/drawing/2014/main" id="{23FEBEDB-C866-4510-AFB0-E64187EE06AA}"/>
               </a:ext>
             </a:extLst>
           </p:cNvPr>
@@ -11958,7 +11966,7 @@
           <p:cNvPr id="4" name="">
             <a:extLst xmlns:a="http://schemas.openxmlformats.org/drawingml/2006/main">
               <a:ext uri="{FF2B5EF4-FFF2-40B4-BE49-F238E27FC236}">
-                <a16:creationId xmlns:a16="http://schemas.microsoft.com/office/drawing/2014/main" id="{68198CB5-EA40-4167-A4B0-69722CE9B28D}"/>
+                <a16:creationId xmlns:a16="http://schemas.microsoft.com/office/drawing/2014/main" id="{630D5710-16B4-46D8-9573-FE391CB15494}"/>
               </a:ext>
             </a:extLst>
           </p:cNvPr>
@@ -12015,7 +12023,7 @@
           <p:cNvPr id="5" name="">
             <a:extLst xmlns:a="http://schemas.openxmlformats.org/drawingml/2006/main">
               <a:ext uri="{FF2B5EF4-FFF2-40B4-BE49-F238E27FC236}">
-                <a16:creationId xmlns:a16="http://schemas.microsoft.com/office/drawing/2014/main" id="{5C7E1DE0-445A-4732-A1DB-35F917977BE9}"/>
+                <a16:creationId xmlns:a16="http://schemas.microsoft.com/office/drawing/2014/main" id="{5B15AE6E-4B0C-4825-ABA4-CB9DB5AF16B1}"/>
               </a:ext>
             </a:extLst>
           </p:cNvPr>
@@ -12072,7 +12080,7 @@
           <p:cNvPr id="6" name="">
             <a:extLst xmlns:a="http://schemas.openxmlformats.org/drawingml/2006/main">
               <a:ext uri="{FF2B5EF4-FFF2-40B4-BE49-F238E27FC236}">
-                <a16:creationId xmlns:a16="http://schemas.microsoft.com/office/drawing/2014/main" id="{735FC48D-CD5E-499C-B764-F31AF5E73EE0}"/>
+                <a16:creationId xmlns:a16="http://schemas.microsoft.com/office/drawing/2014/main" id="{4162DBA0-D4CE-46DE-B498-A83FDFC3CF7F}"/>
               </a:ext>
             </a:extLst>
           </p:cNvPr>
@@ -12129,7 +12137,7 @@
           <p:cNvPr id="7" name="">
             <a:extLst xmlns:a="http://schemas.openxmlformats.org/drawingml/2006/main">
               <a:ext uri="{FF2B5EF4-FFF2-40B4-BE49-F238E27FC236}">
-                <a16:creationId xmlns:a16="http://schemas.microsoft.com/office/drawing/2014/main" id="{F9D27E95-4336-433A-9B29-A8D0174B548A}"/>
+                <a16:creationId xmlns:a16="http://schemas.microsoft.com/office/drawing/2014/main" id="{084C8B06-B26A-4835-BF24-4D688547B7E7}"/>
               </a:ext>
             </a:extLst>
           </p:cNvPr>
@@ -12161,7 +12169,7 @@
           <p:cNvPr id="8" name="">
             <a:extLst xmlns:a="http://schemas.openxmlformats.org/drawingml/2006/main">
               <a:ext uri="{FF2B5EF4-FFF2-40B4-BE49-F238E27FC236}">
-                <a16:creationId xmlns:a16="http://schemas.microsoft.com/office/drawing/2014/main" id="{4DE0C8AA-8ACF-4B95-8D87-FEDD6DAB6514}"/>
+                <a16:creationId xmlns:a16="http://schemas.microsoft.com/office/drawing/2014/main" id="{E16E6BFC-BF19-43C4-B6A9-462802FBF198}"/>
               </a:ext>
             </a:extLst>
           </p:cNvPr>
@@ -12218,7 +12226,7 @@
           <p:cNvPr id="9" name="">
             <a:extLst xmlns:a="http://schemas.openxmlformats.org/drawingml/2006/main">
               <a:ext uri="{FF2B5EF4-FFF2-40B4-BE49-F238E27FC236}">
-                <a16:creationId xmlns:a16="http://schemas.microsoft.com/office/drawing/2014/main" id="{2F9D0495-A982-485F-8311-35A48E52968C}"/>
+                <a16:creationId xmlns:a16="http://schemas.microsoft.com/office/drawing/2014/main" id="{CD062893-C962-46C6-BE0D-47434197B88F}"/>
               </a:ext>
             </a:extLst>
           </p:cNvPr>
@@ -12275,7 +12283,7 @@
           <p:cNvPr id="10" name="">
             <a:extLst xmlns:a="http://schemas.openxmlformats.org/drawingml/2006/main">
               <a:ext uri="{FF2B5EF4-FFF2-40B4-BE49-F238E27FC236}">
-                <a16:creationId xmlns:a16="http://schemas.microsoft.com/office/drawing/2014/main" id="{0320A268-6C2E-454A-A117-02A79D79CAA8}"/>
+                <a16:creationId xmlns:a16="http://schemas.microsoft.com/office/drawing/2014/main" id="{65814D7F-873E-4C72-98BB-16F08C5AA354}"/>
               </a:ext>
             </a:extLst>
           </p:cNvPr>
@@ -12309,7 +12317,7 @@
           <p:cNvPr id="11" name="">
             <a:extLst xmlns:a="http://schemas.openxmlformats.org/drawingml/2006/main">
               <a:ext uri="{FF2B5EF4-FFF2-40B4-BE49-F238E27FC236}">
-                <a16:creationId xmlns:a16="http://schemas.microsoft.com/office/drawing/2014/main" id="{F9F25D54-C0D1-49C8-A757-447F7BEADBEF}"/>
+                <a16:creationId xmlns:a16="http://schemas.microsoft.com/office/drawing/2014/main" id="{4A079E78-05B1-41C4-AA1E-7B2CB744C21C}"/>
               </a:ext>
             </a:extLst>
           </p:cNvPr>
@@ -12341,7 +12349,7 @@
           <p:cNvPr id="12" name="">
             <a:extLst xmlns:a="http://schemas.openxmlformats.org/drawingml/2006/main">
               <a:ext uri="{FF2B5EF4-FFF2-40B4-BE49-F238E27FC236}">
-                <a16:creationId xmlns:a16="http://schemas.microsoft.com/office/drawing/2014/main" id="{1C5CCBCB-1B41-4175-ADB1-51AC741D19F4}"/>
+                <a16:creationId xmlns:a16="http://schemas.microsoft.com/office/drawing/2014/main" id="{3A13991D-C8B8-4CB9-912D-FB591CE79303}"/>
               </a:ext>
             </a:extLst>
           </p:cNvPr>
@@ -12398,7 +12406,7 @@
           <p:cNvPr id="13" name="">
             <a:extLst xmlns:a="http://schemas.openxmlformats.org/drawingml/2006/main">
               <a:ext uri="{FF2B5EF4-FFF2-40B4-BE49-F238E27FC236}">
-                <a16:creationId xmlns:a16="http://schemas.microsoft.com/office/drawing/2014/main" id="{CC55B751-2B1C-4771-8C87-69C35007DDEB}"/>
+                <a16:creationId xmlns:a16="http://schemas.microsoft.com/office/drawing/2014/main" id="{C8903433-3623-492B-B3BD-F69D9055299B}"/>
               </a:ext>
             </a:extLst>
           </p:cNvPr>
@@ -12455,7 +12463,7 @@
           <p:cNvPr id="14" name="">
             <a:extLst xmlns:a="http://schemas.openxmlformats.org/drawingml/2006/main">
               <a:ext uri="{FF2B5EF4-FFF2-40B4-BE49-F238E27FC236}">
-                <a16:creationId xmlns:a16="http://schemas.microsoft.com/office/drawing/2014/main" id="{CFBE09E3-5854-4C3D-B096-A61F2D083284}"/>
+                <a16:creationId xmlns:a16="http://schemas.microsoft.com/office/drawing/2014/main" id="{C86A5F2A-E9D0-483D-ABF3-61C1FBA6DFD0}"/>
               </a:ext>
             </a:extLst>
           </p:cNvPr>
@@ -12489,7 +12497,7 @@
           <p:cNvPr id="15" name="">
             <a:extLst xmlns:a="http://schemas.openxmlformats.org/drawingml/2006/main">
               <a:ext uri="{FF2B5EF4-FFF2-40B4-BE49-F238E27FC236}">
-                <a16:creationId xmlns:a16="http://schemas.microsoft.com/office/drawing/2014/main" id="{8A9747A7-D4F6-472D-BEFE-C7303D63F0B3}"/>
+                <a16:creationId xmlns:a16="http://schemas.microsoft.com/office/drawing/2014/main" id="{8CADFD41-EC7F-40A3-AA04-93448923BD39}"/>
               </a:ext>
             </a:extLst>
           </p:cNvPr>
@@ -12521,7 +12529,7 @@
           <p:cNvPr id="16" name="">
             <a:extLst xmlns:a="http://schemas.openxmlformats.org/drawingml/2006/main">
               <a:ext uri="{FF2B5EF4-FFF2-40B4-BE49-F238E27FC236}">
-                <a16:creationId xmlns:a16="http://schemas.microsoft.com/office/drawing/2014/main" id="{33C09772-EEB3-4A23-999E-E210CE6F5387}"/>
+                <a16:creationId xmlns:a16="http://schemas.microsoft.com/office/drawing/2014/main" id="{109F507C-16A7-49AB-9974-EE9C3A506651}"/>
               </a:ext>
             </a:extLst>
           </p:cNvPr>
@@ -12578,7 +12586,7 @@
           <p:cNvPr id="17" name="">
             <a:extLst xmlns:a="http://schemas.openxmlformats.org/drawingml/2006/main">
               <a:ext uri="{FF2B5EF4-FFF2-40B4-BE49-F238E27FC236}">
-                <a16:creationId xmlns:a16="http://schemas.microsoft.com/office/drawing/2014/main" id="{B4DD70C9-1A81-4F97-A506-D715DEAB15EB}"/>
+                <a16:creationId xmlns:a16="http://schemas.microsoft.com/office/drawing/2014/main" id="{3D654886-C068-448C-8DFC-73B48674A98C}"/>
               </a:ext>
             </a:extLst>
           </p:cNvPr>
@@ -12635,7 +12643,7 @@
           <p:cNvPr id="18" name="">
             <a:extLst xmlns:a="http://schemas.openxmlformats.org/drawingml/2006/main">
               <a:ext uri="{FF2B5EF4-FFF2-40B4-BE49-F238E27FC236}">
-                <a16:creationId xmlns:a16="http://schemas.microsoft.com/office/drawing/2014/main" id="{42E7C612-E52C-45AA-B5DB-A4F670456791}"/>
+                <a16:creationId xmlns:a16="http://schemas.microsoft.com/office/drawing/2014/main" id="{E058FE6F-53B3-474D-B2CE-0E25588B7A33}"/>
               </a:ext>
             </a:extLst>
           </p:cNvPr>
@@ -12669,7 +12677,7 @@
           <p:cNvPr id="19" name="">
             <a:extLst xmlns:a="http://schemas.openxmlformats.org/drawingml/2006/main">
               <a:ext uri="{FF2B5EF4-FFF2-40B4-BE49-F238E27FC236}">
-                <a16:creationId xmlns:a16="http://schemas.microsoft.com/office/drawing/2014/main" id="{1A0FC134-29DB-44F1-908B-D37A05C10502}"/>
+                <a16:creationId xmlns:a16="http://schemas.microsoft.com/office/drawing/2014/main" id="{F1F0DF82-E64B-4048-AE5D-8EEB6C810D14}"/>
               </a:ext>
             </a:extLst>
           </p:cNvPr>
@@ -12701,7 +12709,7 @@
           <p:cNvPr id="20" name="">
             <a:extLst xmlns:a="http://schemas.openxmlformats.org/drawingml/2006/main">
               <a:ext uri="{FF2B5EF4-FFF2-40B4-BE49-F238E27FC236}">
-                <a16:creationId xmlns:a16="http://schemas.microsoft.com/office/drawing/2014/main" id="{4B45EDAF-D037-4F85-AA26-DA9611573EFA}"/>
+                <a16:creationId xmlns:a16="http://schemas.microsoft.com/office/drawing/2014/main" id="{75E5C147-1760-4FF9-93D9-0D2B5E7DC88B}"/>
               </a:ext>
             </a:extLst>
           </p:cNvPr>
@@ -12758,7 +12766,7 @@
           <p:cNvPr id="21" name="">
             <a:extLst xmlns:a="http://schemas.openxmlformats.org/drawingml/2006/main">
               <a:ext uri="{FF2B5EF4-FFF2-40B4-BE49-F238E27FC236}">
-                <a16:creationId xmlns:a16="http://schemas.microsoft.com/office/drawing/2014/main" id="{3C70829D-F5DE-4EA8-9F48-D9DED3AC7C44}"/>
+                <a16:creationId xmlns:a16="http://schemas.microsoft.com/office/drawing/2014/main" id="{D26E38E7-3F2D-440E-8A75-4981B0FD894C}"/>
               </a:ext>
             </a:extLst>
           </p:cNvPr>
@@ -12815,7 +12823,7 @@
           <p:cNvPr id="22" name="">
             <a:extLst xmlns:a="http://schemas.openxmlformats.org/drawingml/2006/main">
               <a:ext uri="{FF2B5EF4-FFF2-40B4-BE49-F238E27FC236}">
-                <a16:creationId xmlns:a16="http://schemas.microsoft.com/office/drawing/2014/main" id="{ADBB1422-88E6-473E-B4E0-368E5FE96AA8}"/>
+                <a16:creationId xmlns:a16="http://schemas.microsoft.com/office/drawing/2014/main" id="{F7B3796F-7F4C-4EDF-8AC4-759B3F23A7EA}"/>
               </a:ext>
             </a:extLst>
           </p:cNvPr>
@@ -12870,7 +12878,7 @@
     </p:spTree>
     <p:extLst>
       <p:ext uri="{BB962C8B-B14F-4D97-AF65-F5344CB8AC3E}">
-        <p14:creationId xmlns:p14="http://schemas.microsoft.com/office/powerpoint/2010/main" val="1871723887"/>
+        <p14:creationId xmlns:p14="http://schemas.microsoft.com/office/powerpoint/2010/main" val="619023881"/>
       </p:ext>
     </p:extLst>
   </p:cSld>
@@ -13071,7 +13079,7 @@
           <p:cNvPr id="22" name="">
             <a:extLst xmlns:a="http://schemas.openxmlformats.org/drawingml/2006/main">
               <a:ext uri="{FF2B5EF4-FFF2-40B4-BE49-F238E27FC236}">
-                <a16:creationId xmlns:a16="http://schemas.microsoft.com/office/drawing/2014/main" id="{D536F172-9D1C-4A46-99FD-DCE609E7861C}"/>
+                <a16:creationId xmlns:a16="http://schemas.microsoft.com/office/drawing/2014/main" id="{4C5DDC0F-945B-4FD5-B5B2-E3E78BD93AB8}"/>
               </a:ext>
             </a:extLst>
           </p:cNvPr>
@@ -13103,7 +13111,7 @@
           <p:cNvPr id="2" name="">
             <a:extLst xmlns:a="http://schemas.openxmlformats.org/drawingml/2006/main">
               <a:ext uri="{FF2B5EF4-FFF2-40B4-BE49-F238E27FC236}">
-                <a16:creationId xmlns:a16="http://schemas.microsoft.com/office/drawing/2014/main" id="{8DA2F311-678D-44C1-8319-A2D03B276041}"/>
+                <a16:creationId xmlns:a16="http://schemas.microsoft.com/office/drawing/2014/main" id="{B5635234-5EC1-406D-9153-A3C1B4BCB28B}"/>
               </a:ext>
             </a:extLst>
           </p:cNvPr>
@@ -13160,7 +13168,7 @@
           <p:cNvPr id="3" name="">
             <a:extLst xmlns:a="http://schemas.openxmlformats.org/drawingml/2006/main">
               <a:ext uri="{FF2B5EF4-FFF2-40B4-BE49-F238E27FC236}">
-                <a16:creationId xmlns:a16="http://schemas.microsoft.com/office/drawing/2014/main" id="{37FD3623-7D47-4286-BBF7-AD6A3E2A4487}"/>
+                <a16:creationId xmlns:a16="http://schemas.microsoft.com/office/drawing/2014/main" id="{14682488-66BB-46C0-AB99-C83A02A2F098}"/>
               </a:ext>
             </a:extLst>
           </p:cNvPr>
@@ -13192,7 +13200,7 @@
           <p:cNvPr id="4" name="">
             <a:extLst xmlns:a="http://schemas.openxmlformats.org/drawingml/2006/main">
               <a:ext uri="{FF2B5EF4-FFF2-40B4-BE49-F238E27FC236}">
-                <a16:creationId xmlns:a16="http://schemas.microsoft.com/office/drawing/2014/main" id="{8165DCA5-F13F-4607-A718-5871080F00E0}"/>
+                <a16:creationId xmlns:a16="http://schemas.microsoft.com/office/drawing/2014/main" id="{0C1CDBF1-0185-4424-88E2-D8CD58AC5AB2}"/>
               </a:ext>
             </a:extLst>
           </p:cNvPr>
@@ -13249,7 +13257,7 @@
           <p:cNvPr id="5" name="">
             <a:extLst xmlns:a="http://schemas.openxmlformats.org/drawingml/2006/main">
               <a:ext uri="{FF2B5EF4-FFF2-40B4-BE49-F238E27FC236}">
-                <a16:creationId xmlns:a16="http://schemas.microsoft.com/office/drawing/2014/main" id="{AC8D2A23-AC67-4988-B54E-5A7B0DBB1505}"/>
+                <a16:creationId xmlns:a16="http://schemas.microsoft.com/office/drawing/2014/main" id="{CD4FD6DF-DA92-4FED-8FB2-FFA2172FA969}"/>
               </a:ext>
             </a:extLst>
           </p:cNvPr>
@@ -13306,7 +13314,7 @@
           <p:cNvPr id="6" name="">
             <a:extLst xmlns:a="http://schemas.openxmlformats.org/drawingml/2006/main">
               <a:ext uri="{FF2B5EF4-FFF2-40B4-BE49-F238E27FC236}">
-                <a16:creationId xmlns:a16="http://schemas.microsoft.com/office/drawing/2014/main" id="{F021F7C6-CCB3-4EAC-A971-CE62A5E90145}"/>
+                <a16:creationId xmlns:a16="http://schemas.microsoft.com/office/drawing/2014/main" id="{B9C4809C-E498-4A66-A353-E53A34428977}"/>
               </a:ext>
             </a:extLst>
           </p:cNvPr>
@@ -13363,7 +13371,7 @@
           <p:cNvPr id="7" name="">
             <a:extLst xmlns:a="http://schemas.openxmlformats.org/drawingml/2006/main">
               <a:ext uri="{FF2B5EF4-FFF2-40B4-BE49-F238E27FC236}">
-                <a16:creationId xmlns:a16="http://schemas.microsoft.com/office/drawing/2014/main" id="{9203A507-050C-49AD-AFB0-EF320E703101}"/>
+                <a16:creationId xmlns:a16="http://schemas.microsoft.com/office/drawing/2014/main" id="{C998159F-AA12-47A3-BF8A-D058FB0D7975}"/>
               </a:ext>
             </a:extLst>
           </p:cNvPr>
@@ -13395,7 +13403,7 @@
           <p:cNvPr id="8" name="">
             <a:extLst xmlns:a="http://schemas.openxmlformats.org/drawingml/2006/main">
               <a:ext uri="{FF2B5EF4-FFF2-40B4-BE49-F238E27FC236}">
-                <a16:creationId xmlns:a16="http://schemas.microsoft.com/office/drawing/2014/main" id="{9AF135DE-4D8C-40D6-AE68-3C1B0C3DC538}"/>
+                <a16:creationId xmlns:a16="http://schemas.microsoft.com/office/drawing/2014/main" id="{918C7AB3-0150-45C7-9FD1-10843CB21558}"/>
               </a:ext>
             </a:extLst>
           </p:cNvPr>
@@ -13452,7 +13460,7 @@
           <p:cNvPr id="9" name="">
             <a:extLst xmlns:a="http://schemas.openxmlformats.org/drawingml/2006/main">
               <a:ext uri="{FF2B5EF4-FFF2-40B4-BE49-F238E27FC236}">
-                <a16:creationId xmlns:a16="http://schemas.microsoft.com/office/drawing/2014/main" id="{78CADA2C-66F3-4AE6-BDBC-2755463D2B7E}"/>
+                <a16:creationId xmlns:a16="http://schemas.microsoft.com/office/drawing/2014/main" id="{593596B8-D139-43B4-9A3E-23D3547F32B1}"/>
               </a:ext>
             </a:extLst>
           </p:cNvPr>
@@ -13509,7 +13517,7 @@
           <p:cNvPr id="10" name="">
             <a:extLst xmlns:a="http://schemas.openxmlformats.org/drawingml/2006/main">
               <a:ext uri="{FF2B5EF4-FFF2-40B4-BE49-F238E27FC236}">
-                <a16:creationId xmlns:a16="http://schemas.microsoft.com/office/drawing/2014/main" id="{EFE7006B-912F-4D3E-8F26-2B1B4298A0B6}"/>
+                <a16:creationId xmlns:a16="http://schemas.microsoft.com/office/drawing/2014/main" id="{0AE4094C-732B-447B-A163-A67B3AD96B05}"/>
               </a:ext>
             </a:extLst>
           </p:cNvPr>
@@ -13543,7 +13551,7 @@
           <p:cNvPr id="11" name="">
             <a:extLst xmlns:a="http://schemas.openxmlformats.org/drawingml/2006/main">
               <a:ext uri="{FF2B5EF4-FFF2-40B4-BE49-F238E27FC236}">
-                <a16:creationId xmlns:a16="http://schemas.microsoft.com/office/drawing/2014/main" id="{6C61582A-56F6-42B8-8BE1-0157779F4893}"/>
+                <a16:creationId xmlns:a16="http://schemas.microsoft.com/office/drawing/2014/main" id="{F9677103-8A37-4F61-8B95-2B1E1A382192}"/>
               </a:ext>
             </a:extLst>
           </p:cNvPr>
@@ -13575,7 +13583,7 @@
           <p:cNvPr id="12" name="">
             <a:extLst xmlns:a="http://schemas.openxmlformats.org/drawingml/2006/main">
               <a:ext uri="{FF2B5EF4-FFF2-40B4-BE49-F238E27FC236}">
-                <a16:creationId xmlns:a16="http://schemas.microsoft.com/office/drawing/2014/main" id="{AEA85D92-4998-4E99-9BE0-20FC8AEFC27C}"/>
+                <a16:creationId xmlns:a16="http://schemas.microsoft.com/office/drawing/2014/main" id="{63C2988D-CFF7-4481-98CD-38205296131E}"/>
               </a:ext>
             </a:extLst>
           </p:cNvPr>
@@ -13632,7 +13640,7 @@
           <p:cNvPr id="13" name="">
             <a:extLst xmlns:a="http://schemas.openxmlformats.org/drawingml/2006/main">
               <a:ext uri="{FF2B5EF4-FFF2-40B4-BE49-F238E27FC236}">
-                <a16:creationId xmlns:a16="http://schemas.microsoft.com/office/drawing/2014/main" id="{2017262C-7670-4914-846B-2FBF75E9DCCC}"/>
+                <a16:creationId xmlns:a16="http://schemas.microsoft.com/office/drawing/2014/main" id="{FADCC9F7-38CD-4B6F-862B-56E5761264EF}"/>
               </a:ext>
             </a:extLst>
           </p:cNvPr>
@@ -13689,7 +13697,7 @@
           <p:cNvPr id="14" name="">
             <a:extLst xmlns:a="http://schemas.openxmlformats.org/drawingml/2006/main">
               <a:ext uri="{FF2B5EF4-FFF2-40B4-BE49-F238E27FC236}">
-                <a16:creationId xmlns:a16="http://schemas.microsoft.com/office/drawing/2014/main" id="{2BFF72C2-6763-4B1A-B46D-C210EF1214F9}"/>
+                <a16:creationId xmlns:a16="http://schemas.microsoft.com/office/drawing/2014/main" id="{73516B39-766C-4A92-A4AC-9FC8C4A1AD14}"/>
               </a:ext>
             </a:extLst>
           </p:cNvPr>
@@ -13723,7 +13731,7 @@
           <p:cNvPr id="15" name="">
             <a:extLst xmlns:a="http://schemas.openxmlformats.org/drawingml/2006/main">
               <a:ext uri="{FF2B5EF4-FFF2-40B4-BE49-F238E27FC236}">
-                <a16:creationId xmlns:a16="http://schemas.microsoft.com/office/drawing/2014/main" id="{7542680D-06F4-4480-B530-9E035FF57FF0}"/>
+                <a16:creationId xmlns:a16="http://schemas.microsoft.com/office/drawing/2014/main" id="{4E6655AF-8D26-46F2-BB03-96089056691E}"/>
               </a:ext>
             </a:extLst>
           </p:cNvPr>
@@ -13755,7 +13763,7 @@
           <p:cNvPr id="16" name="">
             <a:extLst xmlns:a="http://schemas.openxmlformats.org/drawingml/2006/main">
               <a:ext uri="{FF2B5EF4-FFF2-40B4-BE49-F238E27FC236}">
-                <a16:creationId xmlns:a16="http://schemas.microsoft.com/office/drawing/2014/main" id="{9DF5A3E7-CEC0-4C16-BB1B-768A7D7A5088}"/>
+                <a16:creationId xmlns:a16="http://schemas.microsoft.com/office/drawing/2014/main" id="{B4DCC3D0-8747-40EA-B37A-64EA5574F6CE}"/>
               </a:ext>
             </a:extLst>
           </p:cNvPr>
@@ -13812,7 +13820,7 @@
           <p:cNvPr id="17" name="">
             <a:extLst xmlns:a="http://schemas.openxmlformats.org/drawingml/2006/main">
               <a:ext uri="{FF2B5EF4-FFF2-40B4-BE49-F238E27FC236}">
-                <a16:creationId xmlns:a16="http://schemas.microsoft.com/office/drawing/2014/main" id="{4500FB5F-7E48-4D17-B236-0BAF5A99B8C4}"/>
+                <a16:creationId xmlns:a16="http://schemas.microsoft.com/office/drawing/2014/main" id="{7F79C301-C136-4D71-AAEF-694F1E7F0696}"/>
               </a:ext>
             </a:extLst>
           </p:cNvPr>
@@ -13869,7 +13877,7 @@
           <p:cNvPr id="18" name="">
             <a:extLst xmlns:a="http://schemas.openxmlformats.org/drawingml/2006/main">
               <a:ext uri="{FF2B5EF4-FFF2-40B4-BE49-F238E27FC236}">
-                <a16:creationId xmlns:a16="http://schemas.microsoft.com/office/drawing/2014/main" id="{31911897-C4E1-4490-B69B-1CF1D4380B3F}"/>
+                <a16:creationId xmlns:a16="http://schemas.microsoft.com/office/drawing/2014/main" id="{648492CF-F006-4C1E-9B47-19A898FD2270}"/>
               </a:ext>
             </a:extLst>
           </p:cNvPr>
@@ -13903,7 +13911,7 @@
           <p:cNvPr id="19" name="">
             <a:extLst xmlns:a="http://schemas.openxmlformats.org/drawingml/2006/main">
               <a:ext uri="{FF2B5EF4-FFF2-40B4-BE49-F238E27FC236}">
-                <a16:creationId xmlns:a16="http://schemas.microsoft.com/office/drawing/2014/main" id="{A92E2197-A8A1-415B-9638-D180C1EA26D4}"/>
+                <a16:creationId xmlns:a16="http://schemas.microsoft.com/office/drawing/2014/main" id="{CADDE65B-8748-45DA-B76D-4D4798D90EDC}"/>
               </a:ext>
             </a:extLst>
           </p:cNvPr>
@@ -13935,7 +13943,7 @@
           <p:cNvPr id="20" name="">
             <a:extLst xmlns:a="http://schemas.openxmlformats.org/drawingml/2006/main">
               <a:ext uri="{FF2B5EF4-FFF2-40B4-BE49-F238E27FC236}">
-                <a16:creationId xmlns:a16="http://schemas.microsoft.com/office/drawing/2014/main" id="{FD95C023-C358-4E32-968A-E54380BF58E1}"/>
+                <a16:creationId xmlns:a16="http://schemas.microsoft.com/office/drawing/2014/main" id="{16C7452D-7196-4E32-ABF3-7395869A456D}"/>
               </a:ext>
             </a:extLst>
           </p:cNvPr>
@@ -13992,7 +14000,7 @@
           <p:cNvPr id="21" name="">
             <a:extLst xmlns:a="http://schemas.openxmlformats.org/drawingml/2006/main">
               <a:ext uri="{FF2B5EF4-FFF2-40B4-BE49-F238E27FC236}">
-                <a16:creationId xmlns:a16="http://schemas.microsoft.com/office/drawing/2014/main" id="{7BD70F2D-F2D7-4771-A808-B8098A45727B}"/>
+                <a16:creationId xmlns:a16="http://schemas.microsoft.com/office/drawing/2014/main" id="{84608380-2C78-484D-924F-E209BAA92B40}"/>
               </a:ext>
             </a:extLst>
           </p:cNvPr>
@@ -14047,7 +14055,7 @@
     </p:spTree>
     <p:extLst>
       <p:ext uri="{BB962C8B-B14F-4D97-AF65-F5344CB8AC3E}">
-        <p14:creationId xmlns:p14="http://schemas.microsoft.com/office/powerpoint/2010/main" val="715735609"/>
+        <p14:creationId xmlns:p14="http://schemas.microsoft.com/office/powerpoint/2010/main" val="2084760395"/>
       </p:ext>
     </p:extLst>
   </p:cSld>
